--- a/Document/2025경진대회 패널 배포-고등.pptx
+++ b/Document/2025경진대회 패널 배포-고등.pptx
@@ -254,7 +254,7 @@
           <a:p>
             <a:fld id="{CBF1DC50-C5CA-44B4-A558-6C26647E5902}" type="datetimeFigureOut">
               <a:rPr lang="ko-KR" altLang="en-US" smtClean="0"/>
-              <a:t>2025-10-28</a:t>
+              <a:t>2025-11-02</a:t>
             </a:fld>
             <a:endParaRPr lang="ko-KR" altLang="en-US"/>
           </a:p>
@@ -511,7 +511,7 @@
           <a:p>
             <a:fld id="{CBF1DC50-C5CA-44B4-A558-6C26647E5902}" type="datetimeFigureOut">
               <a:rPr lang="ko-KR" altLang="en-US" smtClean="0"/>
-              <a:t>2025-10-28</a:t>
+              <a:t>2025-11-02</a:t>
             </a:fld>
             <a:endParaRPr lang="ko-KR" altLang="en-US"/>
           </a:p>
@@ -681,7 +681,7 @@
           <a:p>
             <a:fld id="{CBF1DC50-C5CA-44B4-A558-6C26647E5902}" type="datetimeFigureOut">
               <a:rPr lang="ko-KR" altLang="en-US" smtClean="0"/>
-              <a:t>2025-10-28</a:t>
+              <a:t>2025-11-02</a:t>
             </a:fld>
             <a:endParaRPr lang="ko-KR" altLang="en-US"/>
           </a:p>
@@ -861,7 +861,7 @@
           <a:p>
             <a:fld id="{CBF1DC50-C5CA-44B4-A558-6C26647E5902}" type="datetimeFigureOut">
               <a:rPr lang="ko-KR" altLang="en-US" smtClean="0"/>
-              <a:t>2025-10-28</a:t>
+              <a:t>2025-11-02</a:t>
             </a:fld>
             <a:endParaRPr lang="ko-KR" altLang="en-US"/>
           </a:p>
@@ -1031,7 +1031,7 @@
           <a:p>
             <a:fld id="{CBF1DC50-C5CA-44B4-A558-6C26647E5902}" type="datetimeFigureOut">
               <a:rPr lang="ko-KR" altLang="en-US" smtClean="0"/>
-              <a:t>2025-10-28</a:t>
+              <a:t>2025-11-02</a:t>
             </a:fld>
             <a:endParaRPr lang="ko-KR" altLang="en-US"/>
           </a:p>
@@ -1275,7 +1275,7 @@
           <a:p>
             <a:fld id="{CBF1DC50-C5CA-44B4-A558-6C26647E5902}" type="datetimeFigureOut">
               <a:rPr lang="ko-KR" altLang="en-US" smtClean="0"/>
-              <a:t>2025-10-28</a:t>
+              <a:t>2025-11-02</a:t>
             </a:fld>
             <a:endParaRPr lang="ko-KR" altLang="en-US"/>
           </a:p>
@@ -1507,7 +1507,7 @@
           <a:p>
             <a:fld id="{CBF1DC50-C5CA-44B4-A558-6C26647E5902}" type="datetimeFigureOut">
               <a:rPr lang="ko-KR" altLang="en-US" smtClean="0"/>
-              <a:t>2025-10-28</a:t>
+              <a:t>2025-11-02</a:t>
             </a:fld>
             <a:endParaRPr lang="ko-KR" altLang="en-US"/>
           </a:p>
@@ -1874,7 +1874,7 @@
           <a:p>
             <a:fld id="{CBF1DC50-C5CA-44B4-A558-6C26647E5902}" type="datetimeFigureOut">
               <a:rPr lang="ko-KR" altLang="en-US" smtClean="0"/>
-              <a:t>2025-10-28</a:t>
+              <a:t>2025-11-02</a:t>
             </a:fld>
             <a:endParaRPr lang="ko-KR" altLang="en-US"/>
           </a:p>
@@ -1992,7 +1992,7 @@
           <a:p>
             <a:fld id="{CBF1DC50-C5CA-44B4-A558-6C26647E5902}" type="datetimeFigureOut">
               <a:rPr lang="ko-KR" altLang="en-US" smtClean="0"/>
-              <a:t>2025-10-28</a:t>
+              <a:t>2025-11-02</a:t>
             </a:fld>
             <a:endParaRPr lang="ko-KR" altLang="en-US"/>
           </a:p>
@@ -2087,7 +2087,7 @@
           <a:p>
             <a:fld id="{CBF1DC50-C5CA-44B4-A558-6C26647E5902}" type="datetimeFigureOut">
               <a:rPr lang="ko-KR" altLang="en-US" smtClean="0"/>
-              <a:t>2025-10-28</a:t>
+              <a:t>2025-11-02</a:t>
             </a:fld>
             <a:endParaRPr lang="ko-KR" altLang="en-US"/>
           </a:p>
@@ -2182,7 +2182,7 @@
           <a:p>
             <a:fld id="{CBF1DC50-C5CA-44B4-A558-6C26647E5902}" type="datetimeFigureOut">
               <a:rPr lang="ko-KR" altLang="en-US" smtClean="0"/>
-              <a:t>2025-10-28</a:t>
+              <a:t>2025-11-02</a:t>
             </a:fld>
             <a:endParaRPr lang="ko-KR" altLang="en-US"/>
           </a:p>
@@ -2489,7 +2489,7 @@
           <a:p>
             <a:fld id="{CBF1DC50-C5CA-44B4-A558-6C26647E5902}" type="datetimeFigureOut">
               <a:rPr lang="ko-KR" altLang="en-US" smtClean="0"/>
-              <a:t>2025-10-28</a:t>
+              <a:t>2025-11-02</a:t>
             </a:fld>
             <a:endParaRPr lang="ko-KR" altLang="en-US"/>
           </a:p>
@@ -2702,7 +2702,7 @@
           <a:p>
             <a:fld id="{CBF1DC50-C5CA-44B4-A558-6C26647E5902}" type="datetimeFigureOut">
               <a:rPr lang="ko-KR" altLang="en-US" smtClean="0"/>
-              <a:t>2025-10-28</a:t>
+              <a:t>2025-11-02</a:t>
             </a:fld>
             <a:endParaRPr lang="ko-KR" altLang="en-US"/>
           </a:p>
@@ -4007,6 +4007,42 @@
           </p:txBody>
         </p:sp>
       </p:grpSp>
+      <p:pic>
+        <p:nvPicPr>
+          <p:cNvPr id="11" name="그림 10" descr="도표, 텍스트, 스크린샷, 라인이(가) 표시된 사진">
+            <a:extLst>
+              <a:ext uri="{FF2B5EF4-FFF2-40B4-BE49-F238E27FC236}">
+                <a16:creationId xmlns:a16="http://schemas.microsoft.com/office/drawing/2014/main" id="{6E92F880-E02E-5AD8-A3CA-132040BA1027}"/>
+              </a:ext>
+            </a:extLst>
+          </p:cNvPr>
+          <p:cNvPicPr>
+            <a:picLocks noChangeAspect="1"/>
+          </p:cNvPicPr>
+          <p:nvPr/>
+        </p:nvPicPr>
+        <p:blipFill>
+          <a:blip r:embed="rId4">
+            <a:extLst>
+              <a:ext uri="{28A0092B-C50C-407E-A947-70E740481C1C}">
+                <a14:useLocalDpi xmlns:a14="http://schemas.microsoft.com/office/drawing/2010/main" val="0"/>
+              </a:ext>
+            </a:extLst>
+          </a:blip>
+          <a:stretch>
+            <a:fillRect/>
+          </a:stretch>
+        </p:blipFill>
+        <p:spPr>
+          <a:xfrm>
+            <a:off x="987631" y="19482258"/>
+            <a:ext cx="21758620" cy="7439823"/>
+          </a:xfrm>
+          <a:prstGeom prst="rect">
+            <a:avLst/>
+          </a:prstGeom>
+        </p:spPr>
+      </p:pic>
     </p:spTree>
     <p:extLst>
       <p:ext uri="{BB962C8B-B14F-4D97-AF65-F5344CB8AC3E}">

--- a/Document/2025경진대회 패널 배포-고등.pptx
+++ b/Document/2025경진대회 패널 배포-고등.pptx
@@ -3477,7 +3477,7 @@
         <p:spPr>
           <a:xfrm>
             <a:off x="1327255" y="899030"/>
-            <a:ext cx="7157729" cy="3323987"/>
+            <a:ext cx="7925568" cy="1708160"/>
           </a:xfrm>
           <a:prstGeom prst="rect">
             <a:avLst/>
@@ -3491,7 +3491,7 @@
           <a:lstStyle/>
           <a:p>
             <a:r>
-              <a:rPr lang="ko-KR" altLang="en-US" sz="10500" dirty="0">
+              <a:rPr lang="en-US" altLang="ko-KR" sz="10500" dirty="0" err="1">
                 <a:solidFill>
                   <a:schemeClr val="bg1"/>
                 </a:solidFill>
@@ -3503,9 +3503,9 @@
                 <a:latin typeface="SUITE Variable Heavy" pitchFamily="2" charset="-127"/>
                 <a:ea typeface="SUITE Variable Heavy" pitchFamily="2" charset="-127"/>
               </a:rPr>
-              <a:t>제목을</a:t>
-            </a:r>
-            <a:endParaRPr lang="en-US" altLang="ko-KR" sz="10500" dirty="0">
+              <a:t>EnergyNow</a:t>
+            </a:r>
+            <a:endParaRPr lang="ko-KR" altLang="en-US" sz="10500" dirty="0">
               <a:solidFill>
                 <a:schemeClr val="bg1"/>
               </a:solidFill>
@@ -3517,23 +3517,6 @@
               <a:latin typeface="SUITE Variable Heavy" pitchFamily="2" charset="-127"/>
               <a:ea typeface="SUITE Variable Heavy" pitchFamily="2" charset="-127"/>
             </a:endParaRPr>
-          </a:p>
-          <a:p>
-            <a:r>
-              <a:rPr lang="ko-KR" altLang="en-US" sz="10500" dirty="0">
-                <a:solidFill>
-                  <a:schemeClr val="bg1"/>
-                </a:solidFill>
-                <a:effectLst>
-                  <a:outerShdw blurRad="88900" dist="38100" dir="2700000" algn="tl" rotWithShape="0">
-                    <a:srgbClr val="004896"/>
-                  </a:outerShdw>
-                </a:effectLst>
-                <a:latin typeface="SUITE Variable Heavy" pitchFamily="2" charset="-127"/>
-                <a:ea typeface="SUITE Variable Heavy" pitchFamily="2" charset="-127"/>
-              </a:rPr>
-              <a:t>입력해주세요</a:t>
-            </a:r>
           </a:p>
         </p:txBody>
       </p:sp>
@@ -3606,7 +3589,7 @@
         <p:spPr>
           <a:xfrm>
             <a:off x="4427694" y="5116076"/>
-            <a:ext cx="1343638" cy="769441"/>
+            <a:ext cx="1646605" cy="769441"/>
           </a:xfrm>
           <a:prstGeom prst="rect">
             <a:avLst/>
@@ -3620,22 +3603,15 @@
           <a:lstStyle/>
           <a:p>
             <a:r>
-              <a:rPr lang="en-US" altLang="ko-KR" sz="4400" dirty="0">
+              <a:rPr lang="ko-KR" altLang="en-US" sz="4400" dirty="0">
                 <a:solidFill>
                   <a:schemeClr val="bg1"/>
                 </a:solidFill>
                 <a:latin typeface="SUITE Variable ExtraBold" pitchFamily="2" charset="-127"/>
                 <a:ea typeface="SUITE Variable ExtraBold" pitchFamily="2" charset="-127"/>
               </a:rPr>
-              <a:t>000</a:t>
-            </a:r>
-            <a:endParaRPr lang="ko-KR" altLang="en-US" sz="4400" dirty="0">
-              <a:solidFill>
-                <a:schemeClr val="bg1"/>
-              </a:solidFill>
-              <a:latin typeface="SUITE Variable ExtraBold" pitchFamily="2" charset="-127"/>
-              <a:ea typeface="SUITE Variable ExtraBold" pitchFamily="2" charset="-127"/>
-            </a:endParaRPr>
+              <a:t>잡도리</a:t>
+            </a:r>
           </a:p>
         </p:txBody>
       </p:sp>
@@ -3701,7 +3677,7 @@
         <p:spPr>
           <a:xfrm>
             <a:off x="4427694" y="5993730"/>
-            <a:ext cx="4219425" cy="769441"/>
+            <a:ext cx="8693405" cy="769441"/>
           </a:xfrm>
           <a:prstGeom prst="rect">
             <a:avLst/>
@@ -3714,6 +3690,16 @@
           </a:bodyPr>
           <a:lstStyle/>
           <a:p>
+            <a:r>
+              <a:rPr lang="ko-KR" altLang="en-US" sz="4400" dirty="0" err="1">
+                <a:solidFill>
+                  <a:schemeClr val="bg1"/>
+                </a:solidFill>
+                <a:latin typeface="SUITE Variable ExtraBold" pitchFamily="2" charset="-127"/>
+                <a:ea typeface="SUITE Variable ExtraBold" pitchFamily="2" charset="-127"/>
+              </a:rPr>
+              <a:t>김환희</a:t>
+            </a:r>
             <a:r>
               <a:rPr lang="en-US" altLang="ko-KR" sz="4400" dirty="0">
                 <a:solidFill>
@@ -3722,15 +3708,78 @@
                 <a:latin typeface="SUITE Variable ExtraBold" pitchFamily="2" charset="-127"/>
                 <a:ea typeface="SUITE Variable ExtraBold" pitchFamily="2" charset="-127"/>
               </a:rPr>
-              <a:t>000, 000 ,000</a:t>
-            </a:r>
-            <a:endParaRPr lang="ko-KR" altLang="en-US" sz="4400" dirty="0">
-              <a:solidFill>
-                <a:schemeClr val="bg1"/>
-              </a:solidFill>
-              <a:latin typeface="SUITE Variable ExtraBold" pitchFamily="2" charset="-127"/>
-              <a:ea typeface="SUITE Variable ExtraBold" pitchFamily="2" charset="-127"/>
-            </a:endParaRPr>
+              <a:t>, </a:t>
+            </a:r>
+            <a:r>
+              <a:rPr lang="ko-KR" altLang="en-US" sz="4400" dirty="0">
+                <a:solidFill>
+                  <a:schemeClr val="bg1"/>
+                </a:solidFill>
+                <a:latin typeface="SUITE Variable ExtraBold" pitchFamily="2" charset="-127"/>
+                <a:ea typeface="SUITE Variable ExtraBold" pitchFamily="2" charset="-127"/>
+              </a:rPr>
+              <a:t>이한별</a:t>
+            </a:r>
+            <a:r>
+              <a:rPr lang="en-US" altLang="ko-KR" sz="4400" dirty="0">
+                <a:solidFill>
+                  <a:schemeClr val="bg1"/>
+                </a:solidFill>
+                <a:latin typeface="SUITE Variable ExtraBold" pitchFamily="2" charset="-127"/>
+                <a:ea typeface="SUITE Variable ExtraBold" pitchFamily="2" charset="-127"/>
+              </a:rPr>
+              <a:t>, </a:t>
+            </a:r>
+            <a:r>
+              <a:rPr lang="ko-KR" altLang="en-US" sz="4400" dirty="0" err="1">
+                <a:solidFill>
+                  <a:schemeClr val="bg1"/>
+                </a:solidFill>
+                <a:latin typeface="SUITE Variable ExtraBold" pitchFamily="2" charset="-127"/>
+                <a:ea typeface="SUITE Variable ExtraBold" pitchFamily="2" charset="-127"/>
+              </a:rPr>
+              <a:t>임강혁</a:t>
+            </a:r>
+            <a:r>
+              <a:rPr lang="en-US" altLang="ko-KR" sz="4400" dirty="0">
+                <a:solidFill>
+                  <a:schemeClr val="bg1"/>
+                </a:solidFill>
+                <a:latin typeface="SUITE Variable ExtraBold" pitchFamily="2" charset="-127"/>
+                <a:ea typeface="SUITE Variable ExtraBold" pitchFamily="2" charset="-127"/>
+              </a:rPr>
+              <a:t>, </a:t>
+            </a:r>
+            <a:r>
+              <a:rPr lang="ko-KR" altLang="en-US" sz="4400" dirty="0">
+                <a:solidFill>
+                  <a:schemeClr val="bg1"/>
+                </a:solidFill>
+                <a:latin typeface="SUITE Variable ExtraBold" pitchFamily="2" charset="-127"/>
+                <a:ea typeface="SUITE Variable ExtraBold" pitchFamily="2" charset="-127"/>
+              </a:rPr>
+              <a:t>장재훈</a:t>
+            </a:r>
+            <a:r>
+              <a:rPr lang="en-US" altLang="ko-KR" sz="4400" dirty="0">
+                <a:solidFill>
+                  <a:schemeClr val="bg1"/>
+                </a:solidFill>
+                <a:latin typeface="SUITE Variable ExtraBold" pitchFamily="2" charset="-127"/>
+                <a:ea typeface="SUITE Variable ExtraBold" pitchFamily="2" charset="-127"/>
+              </a:rPr>
+              <a:t>, </a:t>
+            </a:r>
+            <a:r>
+              <a:rPr lang="ko-KR" altLang="en-US" sz="4400" dirty="0">
+                <a:solidFill>
+                  <a:schemeClr val="bg1"/>
+                </a:solidFill>
+                <a:latin typeface="SUITE Variable ExtraBold" pitchFamily="2" charset="-127"/>
+                <a:ea typeface="SUITE Variable ExtraBold" pitchFamily="2" charset="-127"/>
+              </a:rPr>
+              <a:t>최승표</a:t>
+            </a:r>
           </a:p>
         </p:txBody>
       </p:sp>
@@ -3891,7 +3940,7 @@
         <p:spPr>
           <a:xfrm>
             <a:off x="4427694" y="7749039"/>
-            <a:ext cx="3369833" cy="769441"/>
+            <a:ext cx="5057795" cy="769441"/>
           </a:xfrm>
           <a:prstGeom prst="rect">
             <a:avLst/>
@@ -3904,16 +3953,6 @@
           </a:bodyPr>
           <a:lstStyle/>
           <a:p>
-            <a:r>
-              <a:rPr lang="en-US" altLang="ko-KR" sz="4400" dirty="0">
-                <a:solidFill>
-                  <a:schemeClr val="bg1"/>
-                </a:solidFill>
-                <a:latin typeface="SUITE Variable ExtraBold" pitchFamily="2" charset="-127"/>
-                <a:ea typeface="SUITE Variable ExtraBold" pitchFamily="2" charset="-127"/>
-              </a:rPr>
-              <a:t>000</a:t>
-            </a:r>
             <a:r>
               <a:rPr lang="ko-KR" altLang="en-US" sz="4400" dirty="0">
                 <a:solidFill>
@@ -3922,7 +3961,7 @@
                 <a:latin typeface="SUITE Variable ExtraBold" pitchFamily="2" charset="-127"/>
                 <a:ea typeface="SUITE Variable ExtraBold" pitchFamily="2" charset="-127"/>
               </a:rPr>
-              <a:t>고등학교</a:t>
+              <a:t>수도전기공업고등학교</a:t>
             </a:r>
           </a:p>
         </p:txBody>
@@ -4043,6 +4082,186 @@
           </a:prstGeom>
         </p:spPr>
       </p:pic>
+      <p:sp>
+        <p:nvSpPr>
+          <p:cNvPr id="3" name="TextBox 2">
+            <a:extLst>
+              <a:ext uri="{FF2B5EF4-FFF2-40B4-BE49-F238E27FC236}">
+                <a16:creationId xmlns:a16="http://schemas.microsoft.com/office/drawing/2014/main" id="{917D8326-922A-DD2C-7BCC-62732B7FEDC7}"/>
+              </a:ext>
+            </a:extLst>
+          </p:cNvPr>
+          <p:cNvSpPr txBox="1"/>
+          <p:nvPr/>
+        </p:nvSpPr>
+        <p:spPr>
+          <a:xfrm>
+            <a:off x="987631" y="11084576"/>
+            <a:ext cx="23081840" cy="3038204"/>
+          </a:xfrm>
+          <a:prstGeom prst="rect">
+            <a:avLst/>
+          </a:prstGeom>
+          <a:noFill/>
+        </p:spPr>
+        <p:txBody>
+          <a:bodyPr wrap="square">
+            <a:spAutoFit/>
+          </a:bodyPr>
+          <a:lstStyle/>
+          <a:p>
+            <a:r>
+              <a:rPr lang="ko-KR" altLang="en-US" dirty="0">
+                <a:latin typeface="SUITE Variable Heavy" pitchFamily="2" charset="-127"/>
+                <a:ea typeface="SUITE Variable Heavy" pitchFamily="2" charset="-127"/>
+              </a:rPr>
+              <a:t>목적</a:t>
+            </a:r>
+            <a:endParaRPr lang="en-US" altLang="ko-KR" sz="7200" dirty="0">
+              <a:latin typeface="SUITE Variable Heavy" pitchFamily="2" charset="-127"/>
+              <a:ea typeface="SUITE Variable Heavy" pitchFamily="2" charset="-127"/>
+            </a:endParaRPr>
+          </a:p>
+          <a:p>
+            <a:r>
+              <a:rPr lang="ko-KR" altLang="en-US" sz="6000" dirty="0">
+                <a:latin typeface="SUITE Variable Medium" pitchFamily="2" charset="-127"/>
+                <a:ea typeface="SUITE Variable Medium" pitchFamily="2" charset="-127"/>
+              </a:rPr>
+              <a:t>저희 웹사이트의 목적은 대한민국 국민이 우리나라의 전력생산 구조와 발전량 변동을 직관적으로 이해하도록 돕고</a:t>
+            </a:r>
+            <a:r>
+              <a:rPr lang="en-US" altLang="ko-KR" sz="6000" dirty="0">
+                <a:latin typeface="SUITE Variable Medium" pitchFamily="2" charset="-127"/>
+                <a:ea typeface="SUITE Variable Medium" pitchFamily="2" charset="-127"/>
+              </a:rPr>
+              <a:t>, </a:t>
+            </a:r>
+            <a:r>
+              <a:rPr lang="ko-KR" altLang="en-US" sz="6000" dirty="0">
+                <a:latin typeface="SUITE Variable Medium" pitchFamily="2" charset="-127"/>
+                <a:ea typeface="SUITE Variable Medium" pitchFamily="2" charset="-127"/>
+              </a:rPr>
+              <a:t>이를 다양한 분야로 확장시키는 것입니다</a:t>
+            </a:r>
+            <a:r>
+              <a:rPr lang="en-US" altLang="ko-KR" sz="6000" dirty="0">
+                <a:latin typeface="SUITE Variable Medium" pitchFamily="2" charset="-127"/>
+                <a:ea typeface="SUITE Variable Medium" pitchFamily="2" charset="-127"/>
+              </a:rPr>
+              <a:t>.</a:t>
+            </a:r>
+            <a:endParaRPr lang="ko-KR" altLang="en-US" sz="6000" dirty="0">
+              <a:latin typeface="SUITE Variable Medium" pitchFamily="2" charset="-127"/>
+              <a:ea typeface="SUITE Variable Medium" pitchFamily="2" charset="-127"/>
+            </a:endParaRPr>
+          </a:p>
+        </p:txBody>
+      </p:sp>
+      <p:sp>
+        <p:nvSpPr>
+          <p:cNvPr id="6" name="TextBox 5">
+            <a:extLst>
+              <a:ext uri="{FF2B5EF4-FFF2-40B4-BE49-F238E27FC236}">
+                <a16:creationId xmlns:a16="http://schemas.microsoft.com/office/drawing/2014/main" id="{A98A72FB-5A57-0E91-E6D0-19DAA0CF2243}"/>
+              </a:ext>
+            </a:extLst>
+          </p:cNvPr>
+          <p:cNvSpPr txBox="1"/>
+          <p:nvPr/>
+        </p:nvSpPr>
+        <p:spPr>
+          <a:xfrm>
+            <a:off x="987630" y="14122780"/>
+            <a:ext cx="22885089" cy="3961534"/>
+          </a:xfrm>
+          <a:prstGeom prst="rect">
+            <a:avLst/>
+          </a:prstGeom>
+          <a:noFill/>
+        </p:spPr>
+        <p:txBody>
+          <a:bodyPr wrap="square">
+            <a:spAutoFit/>
+          </a:bodyPr>
+          <a:lstStyle/>
+          <a:p>
+            <a:r>
+              <a:rPr lang="ko-KR" altLang="en-US" dirty="0">
+                <a:latin typeface="SUITE Variable Heavy" pitchFamily="2" charset="-127"/>
+                <a:ea typeface="SUITE Variable Heavy" pitchFamily="2" charset="-127"/>
+              </a:rPr>
+              <a:t>배경</a:t>
+            </a:r>
+            <a:endParaRPr lang="en-US" altLang="ko-KR" dirty="0">
+              <a:latin typeface="SUITE Variable Heavy" pitchFamily="2" charset="-127"/>
+              <a:ea typeface="SUITE Variable Heavy" pitchFamily="2" charset="-127"/>
+            </a:endParaRPr>
+          </a:p>
+          <a:p>
+            <a:r>
+              <a:rPr lang="ko-KR" altLang="en-US" sz="6000" dirty="0">
+                <a:latin typeface="SUITE Variable Medium" pitchFamily="2" charset="-127"/>
+                <a:ea typeface="SUITE Variable Medium" pitchFamily="2" charset="-127"/>
+              </a:rPr>
+              <a:t>아이디어를 구상할 때</a:t>
+            </a:r>
+            <a:r>
+              <a:rPr lang="en-US" altLang="ko-KR" sz="6000" dirty="0">
+                <a:latin typeface="SUITE Variable Medium" pitchFamily="2" charset="-127"/>
+                <a:ea typeface="SUITE Variable Medium" pitchFamily="2" charset="-127"/>
+              </a:rPr>
+              <a:t>, </a:t>
+            </a:r>
+            <a:r>
+              <a:rPr lang="ko-KR" altLang="en-US" sz="6000" dirty="0">
+                <a:latin typeface="SUITE Variable Medium" pitchFamily="2" charset="-127"/>
+                <a:ea typeface="SUITE Variable Medium" pitchFamily="2" charset="-127"/>
+              </a:rPr>
+              <a:t>국민들이 실시간으로 발전량을 볼 수 있는 사이트가 없다는 것을 알게 되었습니다</a:t>
+            </a:r>
+            <a:r>
+              <a:rPr lang="en-US" altLang="ko-KR" sz="6000" dirty="0">
+                <a:latin typeface="SUITE Variable Medium" pitchFamily="2" charset="-127"/>
+                <a:ea typeface="SUITE Variable Medium" pitchFamily="2" charset="-127"/>
+              </a:rPr>
+              <a:t>. </a:t>
+            </a:r>
+            <a:r>
+              <a:rPr lang="ko-KR" altLang="en-US" sz="6000" dirty="0">
+                <a:latin typeface="SUITE Variable Medium" pitchFamily="2" charset="-127"/>
+                <a:ea typeface="SUITE Variable Medium" pitchFamily="2" charset="-127"/>
+              </a:rPr>
+              <a:t>사람들이 에너지 발전량의 흥미를 가지면 우리나라의 에너지 산업의 기대치를 올릴 수 있어</a:t>
+            </a:r>
+            <a:r>
+              <a:rPr lang="en-US" altLang="ko-KR" sz="6000" dirty="0">
+                <a:latin typeface="SUITE Variable Medium" pitchFamily="2" charset="-127"/>
+                <a:ea typeface="SUITE Variable Medium" pitchFamily="2" charset="-127"/>
+              </a:rPr>
+              <a:t>, </a:t>
+            </a:r>
+            <a:r>
+              <a:rPr lang="ko-KR" altLang="en-US" sz="6000" dirty="0">
+                <a:latin typeface="SUITE Variable Medium" pitchFamily="2" charset="-127"/>
+                <a:ea typeface="SUITE Variable Medium" pitchFamily="2" charset="-127"/>
+              </a:rPr>
+              <a:t>이 웹 사이트를 개발하게 되었습니다</a:t>
+            </a:r>
+            <a:r>
+              <a:rPr lang="en-US" altLang="ko-KR" sz="6000" dirty="0">
+                <a:latin typeface="SUITE Variable Medium" pitchFamily="2" charset="-127"/>
+                <a:ea typeface="SUITE Variable Medium" pitchFamily="2" charset="-127"/>
+              </a:rPr>
+              <a:t>. </a:t>
+            </a:r>
+            <a:endParaRPr lang="ko-KR" altLang="en-US" sz="6000" dirty="0">
+              <a:latin typeface="SUITE Variable Medium" pitchFamily="2" charset="-127"/>
+              <a:ea typeface="SUITE Variable Medium" pitchFamily="2" charset="-127"/>
+            </a:endParaRPr>
+          </a:p>
+        </p:txBody>
+      </p:sp>
     </p:spTree>
     <p:extLst>
       <p:ext uri="{BB962C8B-B14F-4D97-AF65-F5344CB8AC3E}">

--- a/Document/2025경진대회 패널 배포-고등.pptx
+++ b/Document/2025경진대회 패널 배포-고등.pptx
@@ -254,7 +254,7 @@
           <a:p>
             <a:fld id="{CBF1DC50-C5CA-44B4-A558-6C26647E5902}" type="datetimeFigureOut">
               <a:rPr lang="ko-KR" altLang="en-US" smtClean="0"/>
-              <a:t>2025-11-02</a:t>
+              <a:t>2025-11-06</a:t>
             </a:fld>
             <a:endParaRPr lang="ko-KR" altLang="en-US"/>
           </a:p>
@@ -511,7 +511,7 @@
           <a:p>
             <a:fld id="{CBF1DC50-C5CA-44B4-A558-6C26647E5902}" type="datetimeFigureOut">
               <a:rPr lang="ko-KR" altLang="en-US" smtClean="0"/>
-              <a:t>2025-11-02</a:t>
+              <a:t>2025-11-06</a:t>
             </a:fld>
             <a:endParaRPr lang="ko-KR" altLang="en-US"/>
           </a:p>
@@ -681,7 +681,7 @@
           <a:p>
             <a:fld id="{CBF1DC50-C5CA-44B4-A558-6C26647E5902}" type="datetimeFigureOut">
               <a:rPr lang="ko-KR" altLang="en-US" smtClean="0"/>
-              <a:t>2025-11-02</a:t>
+              <a:t>2025-11-06</a:t>
             </a:fld>
             <a:endParaRPr lang="ko-KR" altLang="en-US"/>
           </a:p>
@@ -861,7 +861,7 @@
           <a:p>
             <a:fld id="{CBF1DC50-C5CA-44B4-A558-6C26647E5902}" type="datetimeFigureOut">
               <a:rPr lang="ko-KR" altLang="en-US" smtClean="0"/>
-              <a:t>2025-11-02</a:t>
+              <a:t>2025-11-06</a:t>
             </a:fld>
             <a:endParaRPr lang="ko-KR" altLang="en-US"/>
           </a:p>
@@ -1031,7 +1031,7 @@
           <a:p>
             <a:fld id="{CBF1DC50-C5CA-44B4-A558-6C26647E5902}" type="datetimeFigureOut">
               <a:rPr lang="ko-KR" altLang="en-US" smtClean="0"/>
-              <a:t>2025-11-02</a:t>
+              <a:t>2025-11-06</a:t>
             </a:fld>
             <a:endParaRPr lang="ko-KR" altLang="en-US"/>
           </a:p>
@@ -1275,7 +1275,7 @@
           <a:p>
             <a:fld id="{CBF1DC50-C5CA-44B4-A558-6C26647E5902}" type="datetimeFigureOut">
               <a:rPr lang="ko-KR" altLang="en-US" smtClean="0"/>
-              <a:t>2025-11-02</a:t>
+              <a:t>2025-11-06</a:t>
             </a:fld>
             <a:endParaRPr lang="ko-KR" altLang="en-US"/>
           </a:p>
@@ -1507,7 +1507,7 @@
           <a:p>
             <a:fld id="{CBF1DC50-C5CA-44B4-A558-6C26647E5902}" type="datetimeFigureOut">
               <a:rPr lang="ko-KR" altLang="en-US" smtClean="0"/>
-              <a:t>2025-11-02</a:t>
+              <a:t>2025-11-06</a:t>
             </a:fld>
             <a:endParaRPr lang="ko-KR" altLang="en-US"/>
           </a:p>
@@ -1874,7 +1874,7 @@
           <a:p>
             <a:fld id="{CBF1DC50-C5CA-44B4-A558-6C26647E5902}" type="datetimeFigureOut">
               <a:rPr lang="ko-KR" altLang="en-US" smtClean="0"/>
-              <a:t>2025-11-02</a:t>
+              <a:t>2025-11-06</a:t>
             </a:fld>
             <a:endParaRPr lang="ko-KR" altLang="en-US"/>
           </a:p>
@@ -1992,7 +1992,7 @@
           <a:p>
             <a:fld id="{CBF1DC50-C5CA-44B4-A558-6C26647E5902}" type="datetimeFigureOut">
               <a:rPr lang="ko-KR" altLang="en-US" smtClean="0"/>
-              <a:t>2025-11-02</a:t>
+              <a:t>2025-11-06</a:t>
             </a:fld>
             <a:endParaRPr lang="ko-KR" altLang="en-US"/>
           </a:p>
@@ -2087,7 +2087,7 @@
           <a:p>
             <a:fld id="{CBF1DC50-C5CA-44B4-A558-6C26647E5902}" type="datetimeFigureOut">
               <a:rPr lang="ko-KR" altLang="en-US" smtClean="0"/>
-              <a:t>2025-11-02</a:t>
+              <a:t>2025-11-06</a:t>
             </a:fld>
             <a:endParaRPr lang="ko-KR" altLang="en-US"/>
           </a:p>
@@ -2182,7 +2182,7 @@
           <a:p>
             <a:fld id="{CBF1DC50-C5CA-44B4-A558-6C26647E5902}" type="datetimeFigureOut">
               <a:rPr lang="ko-KR" altLang="en-US" smtClean="0"/>
-              <a:t>2025-11-02</a:t>
+              <a:t>2025-11-06</a:t>
             </a:fld>
             <a:endParaRPr lang="ko-KR" altLang="en-US"/>
           </a:p>
@@ -2489,7 +2489,7 @@
           <a:p>
             <a:fld id="{CBF1DC50-C5CA-44B4-A558-6C26647E5902}" type="datetimeFigureOut">
               <a:rPr lang="ko-KR" altLang="en-US" smtClean="0"/>
-              <a:t>2025-11-02</a:t>
+              <a:t>2025-11-06</a:t>
             </a:fld>
             <a:endParaRPr lang="ko-KR" altLang="en-US"/>
           </a:p>
@@ -2702,7 +2702,7 @@
           <a:p>
             <a:fld id="{CBF1DC50-C5CA-44B4-A558-6C26647E5902}" type="datetimeFigureOut">
               <a:rPr lang="ko-KR" altLang="en-US" smtClean="0"/>
-              <a:t>2025-11-02</a:t>
+              <a:t>2025-11-06</a:t>
             </a:fld>
             <a:endParaRPr lang="ko-KR" altLang="en-US"/>
           </a:p>
@@ -3477,7 +3477,7 @@
         <p:spPr>
           <a:xfrm>
             <a:off x="1327255" y="899030"/>
-            <a:ext cx="7925568" cy="1708160"/>
+            <a:ext cx="16814218" cy="3170099"/>
           </a:xfrm>
           <a:prstGeom prst="rect">
             <a:avLst/>
@@ -3491,7 +3491,7 @@
           <a:lstStyle/>
           <a:p>
             <a:r>
-              <a:rPr lang="en-US" altLang="ko-KR" sz="10500" dirty="0" err="1">
+              <a:rPr lang="en-US" altLang="ko-KR" sz="12000" dirty="0" err="1">
                 <a:solidFill>
                   <a:schemeClr val="bg1"/>
                 </a:solidFill>
@@ -3505,7 +3505,7 @@
               </a:rPr>
               <a:t>EnergyNow</a:t>
             </a:r>
-            <a:endParaRPr lang="ko-KR" altLang="en-US" sz="10500" dirty="0">
+            <a:endParaRPr lang="en-US" altLang="ko-KR" sz="12000" dirty="0">
               <a:solidFill>
                 <a:schemeClr val="bg1"/>
               </a:solidFill>
@@ -3516,6 +3516,64 @@
               </a:effectLst>
               <a:latin typeface="SUITE Variable Heavy" pitchFamily="2" charset="-127"/>
               <a:ea typeface="SUITE Variable Heavy" pitchFamily="2" charset="-127"/>
+            </a:endParaRPr>
+          </a:p>
+          <a:p>
+            <a:endParaRPr lang="en-US" altLang="ko-KR" sz="3500" dirty="0">
+              <a:solidFill>
+                <a:schemeClr val="bg1"/>
+              </a:solidFill>
+              <a:effectLst>
+                <a:outerShdw blurRad="88900" dist="38100" dir="2700000" algn="tl" rotWithShape="0">
+                  <a:srgbClr val="004896"/>
+                </a:outerShdw>
+              </a:effectLst>
+              <a:latin typeface="SUITE Variable Heavy" pitchFamily="2" charset="-127"/>
+              <a:ea typeface="SUITE Variable Heavy" pitchFamily="2" charset="-127"/>
+            </a:endParaRPr>
+          </a:p>
+          <a:p>
+            <a:r>
+              <a:rPr lang="ko-KR" altLang="en-US" sz="4500" dirty="0">
+                <a:solidFill>
+                  <a:schemeClr val="bg1"/>
+                </a:solidFill>
+                <a:latin typeface="SUITE Variable Light" pitchFamily="2" charset="-127"/>
+                <a:ea typeface="SUITE Variable Light" pitchFamily="2" charset="-127"/>
+              </a:rPr>
+              <a:t>실시간 발전 데이터를 시각화해 에너지 이해와 활용을 돕는 교육</a:t>
+            </a:r>
+            <a:r>
+              <a:rPr lang="en-US" altLang="ko-KR" sz="4500" dirty="0">
+                <a:solidFill>
+                  <a:schemeClr val="bg1"/>
+                </a:solidFill>
+                <a:latin typeface="SUITE Variable Light" pitchFamily="2" charset="-127"/>
+                <a:ea typeface="SUITE Variable Light" pitchFamily="2" charset="-127"/>
+              </a:rPr>
+              <a:t>·</a:t>
+            </a:r>
+            <a:r>
+              <a:rPr lang="ko-KR" altLang="en-US" sz="4500" dirty="0">
+                <a:solidFill>
+                  <a:schemeClr val="bg1"/>
+                </a:solidFill>
+                <a:latin typeface="SUITE Variable Light" pitchFamily="2" charset="-127"/>
+                <a:ea typeface="SUITE Variable Light" pitchFamily="2" charset="-127"/>
+              </a:rPr>
+              <a:t>정보 플랫폼</a:t>
+            </a:r>
+            <a:endParaRPr lang="ko-KR" altLang="en-US" sz="4500" dirty="0">
+              <a:solidFill>
+                <a:schemeClr val="bg1"/>
+              </a:solidFill>
+              <a:effectLst>
+                <a:outerShdw blurRad="88900" dist="38100" dir="2700000" algn="tl" rotWithShape="0">
+                  <a:srgbClr val="004896"/>
+                </a:outerShdw>
+              </a:effectLst>
+              <a:latin typeface="SUITE Variable Light" pitchFamily="2" charset="-127"/>
+              <a:ea typeface="SUITE Variable Light" pitchFamily="2" charset="-127"/>
             </a:endParaRPr>
           </a:p>
         </p:txBody>
@@ -3845,7 +3903,7 @@
         <p:spPr>
           <a:xfrm>
             <a:off x="4427694" y="6871384"/>
-            <a:ext cx="1550424" cy="769441"/>
+            <a:ext cx="1776448" cy="769441"/>
           </a:xfrm>
           <a:prstGeom prst="rect">
             <a:avLst/>
@@ -3858,6 +3916,16 @@
           </a:bodyPr>
           <a:lstStyle/>
           <a:p>
+            <a:r>
+              <a:rPr lang="ko-KR" altLang="en-US" sz="4400" dirty="0">
+                <a:solidFill>
+                  <a:schemeClr val="bg1"/>
+                </a:solidFill>
+                <a:latin typeface="SUITE Variable ExtraBold" pitchFamily="2" charset="-127"/>
+                <a:ea typeface="SUITE Variable ExtraBold" pitchFamily="2" charset="-127"/>
+              </a:rPr>
+              <a:t>박태영</a:t>
+            </a:r>
             <a:r>
               <a:rPr lang="en-US" altLang="ko-KR" sz="4400" dirty="0">
                 <a:solidFill>
@@ -3866,7 +3934,7 @@
                 <a:latin typeface="SUITE Variable ExtraBold" pitchFamily="2" charset="-127"/>
                 <a:ea typeface="SUITE Variable ExtraBold" pitchFamily="2" charset="-127"/>
               </a:rPr>
-              <a:t>000 </a:t>
+              <a:t> </a:t>
             </a:r>
             <a:endParaRPr lang="ko-KR" altLang="en-US" sz="4400" dirty="0">
               <a:solidFill>
@@ -4258,6 +4326,99 @@
             <a:endParaRPr lang="ko-KR" altLang="en-US" sz="6000" dirty="0">
               <a:latin typeface="SUITE Variable Medium" pitchFamily="2" charset="-127"/>
               <a:ea typeface="SUITE Variable Medium" pitchFamily="2" charset="-127"/>
+            </a:endParaRPr>
+          </a:p>
+        </p:txBody>
+      </p:sp>
+      <p:sp>
+        <p:nvSpPr>
+          <p:cNvPr id="2" name="TextBox 1">
+            <a:extLst>
+              <a:ext uri="{FF2B5EF4-FFF2-40B4-BE49-F238E27FC236}">
+                <a16:creationId xmlns:a16="http://schemas.microsoft.com/office/drawing/2014/main" id="{346399B5-EBF2-13D1-AAF4-88B42BE97E1C}"/>
+              </a:ext>
+            </a:extLst>
+          </p:cNvPr>
+          <p:cNvSpPr txBox="1"/>
+          <p:nvPr/>
+        </p:nvSpPr>
+        <p:spPr>
+          <a:xfrm>
+            <a:off x="1015623" y="36992170"/>
+            <a:ext cx="21538268" cy="4555093"/>
+          </a:xfrm>
+          <a:prstGeom prst="rect">
+            <a:avLst/>
+          </a:prstGeom>
+          <a:noFill/>
+        </p:spPr>
+        <p:txBody>
+          <a:bodyPr wrap="none" rtlCol="0">
+            <a:spAutoFit/>
+          </a:bodyPr>
+          <a:lstStyle/>
+          <a:p>
+            <a:r>
+              <a:rPr lang="ko-KR" altLang="en-US" sz="7100" dirty="0">
+                <a:latin typeface="SUITE Variable Heavy" pitchFamily="2" charset="-127"/>
+                <a:ea typeface="SUITE Variable Heavy" pitchFamily="2" charset="-127"/>
+              </a:rPr>
+              <a:t>기대효과</a:t>
+            </a:r>
+            <a:endParaRPr lang="en-US" altLang="ko-KR" sz="7100" dirty="0">
+              <a:latin typeface="SUITE Variable Heavy" pitchFamily="2" charset="-127"/>
+              <a:ea typeface="SUITE Variable Heavy" pitchFamily="2" charset="-127"/>
+            </a:endParaRPr>
+          </a:p>
+          <a:p>
+            <a:r>
+              <a:rPr lang="ko-KR" altLang="en-US" sz="5500" dirty="0"/>
+              <a:t>이 프로젝트는 실시간 발전 데이터를 시각적으로 보여줌으로써 </a:t>
+            </a:r>
+            <a:endParaRPr lang="en-US" altLang="ko-KR" sz="5500" dirty="0"/>
+          </a:p>
+          <a:p>
+            <a:r>
+              <a:rPr lang="ko-KR" altLang="en-US" sz="5500" dirty="0"/>
+              <a:t>학생들의 체험형 에너지 학습 기회를 제공하고</a:t>
+            </a:r>
+            <a:r>
+              <a:rPr lang="en-US" altLang="ko-KR" sz="5500" dirty="0"/>
+              <a:t>,</a:t>
+            </a:r>
+            <a:r>
+              <a:rPr lang="ko-KR" altLang="en-US" sz="5500" dirty="0"/>
+              <a:t> 시민들의 환경 의식을 </a:t>
+            </a:r>
+            <a:endParaRPr lang="en-US" altLang="ko-KR" sz="5500" dirty="0"/>
+          </a:p>
+          <a:p>
+            <a:r>
+              <a:rPr lang="ko-KR" altLang="en-US" sz="5500" dirty="0"/>
+              <a:t>높입니다</a:t>
+            </a:r>
+            <a:r>
+              <a:rPr lang="en-US" altLang="ko-KR" sz="5500" dirty="0"/>
+              <a:t>. </a:t>
+            </a:r>
+            <a:r>
+              <a:rPr lang="ko-KR" altLang="en-US" sz="5500" dirty="0"/>
+              <a:t>또한 데이터를 활용해 에너지 산업의 효율적 의사결정을 </a:t>
+            </a:r>
+            <a:endParaRPr lang="en-US" altLang="ko-KR" sz="5500" dirty="0"/>
+          </a:p>
+          <a:p>
+            <a:r>
+              <a:rPr lang="ko-KR" altLang="en-US" sz="5500" dirty="0"/>
+              <a:t>지원합니다</a:t>
+            </a:r>
+            <a:r>
+              <a:rPr lang="en-US" altLang="ko-KR" sz="5500" dirty="0"/>
+              <a:t>.</a:t>
+            </a:r>
+            <a:endParaRPr lang="ko-KR" altLang="en-US" sz="5500" dirty="0">
+              <a:latin typeface="SUITE Variable Light" pitchFamily="2" charset="-127"/>
+              <a:ea typeface="SUITE Variable Light" pitchFamily="2" charset="-127"/>
             </a:endParaRPr>
           </a:p>
         </p:txBody>

--- a/Document/2025경진대회 패널 배포-고등.pptx
+++ b/Document/2025경진대회 패널 배포-고등.pptx
@@ -254,7 +254,7 @@
           <a:p>
             <a:fld id="{CBF1DC50-C5CA-44B4-A558-6C26647E5902}" type="datetimeFigureOut">
               <a:rPr lang="ko-KR" altLang="en-US" smtClean="0"/>
-              <a:t>2025-11-06</a:t>
+              <a:t>2025-11-08</a:t>
             </a:fld>
             <a:endParaRPr lang="ko-KR" altLang="en-US"/>
           </a:p>
@@ -511,7 +511,7 @@
           <a:p>
             <a:fld id="{CBF1DC50-C5CA-44B4-A558-6C26647E5902}" type="datetimeFigureOut">
               <a:rPr lang="ko-KR" altLang="en-US" smtClean="0"/>
-              <a:t>2025-11-06</a:t>
+              <a:t>2025-11-08</a:t>
             </a:fld>
             <a:endParaRPr lang="ko-KR" altLang="en-US"/>
           </a:p>
@@ -681,7 +681,7 @@
           <a:p>
             <a:fld id="{CBF1DC50-C5CA-44B4-A558-6C26647E5902}" type="datetimeFigureOut">
               <a:rPr lang="ko-KR" altLang="en-US" smtClean="0"/>
-              <a:t>2025-11-06</a:t>
+              <a:t>2025-11-08</a:t>
             </a:fld>
             <a:endParaRPr lang="ko-KR" altLang="en-US"/>
           </a:p>
@@ -861,7 +861,7 @@
           <a:p>
             <a:fld id="{CBF1DC50-C5CA-44B4-A558-6C26647E5902}" type="datetimeFigureOut">
               <a:rPr lang="ko-KR" altLang="en-US" smtClean="0"/>
-              <a:t>2025-11-06</a:t>
+              <a:t>2025-11-08</a:t>
             </a:fld>
             <a:endParaRPr lang="ko-KR" altLang="en-US"/>
           </a:p>
@@ -1031,7 +1031,7 @@
           <a:p>
             <a:fld id="{CBF1DC50-C5CA-44B4-A558-6C26647E5902}" type="datetimeFigureOut">
               <a:rPr lang="ko-KR" altLang="en-US" smtClean="0"/>
-              <a:t>2025-11-06</a:t>
+              <a:t>2025-11-08</a:t>
             </a:fld>
             <a:endParaRPr lang="ko-KR" altLang="en-US"/>
           </a:p>
@@ -1275,7 +1275,7 @@
           <a:p>
             <a:fld id="{CBF1DC50-C5CA-44B4-A558-6C26647E5902}" type="datetimeFigureOut">
               <a:rPr lang="ko-KR" altLang="en-US" smtClean="0"/>
-              <a:t>2025-11-06</a:t>
+              <a:t>2025-11-08</a:t>
             </a:fld>
             <a:endParaRPr lang="ko-KR" altLang="en-US"/>
           </a:p>
@@ -1507,7 +1507,7 @@
           <a:p>
             <a:fld id="{CBF1DC50-C5CA-44B4-A558-6C26647E5902}" type="datetimeFigureOut">
               <a:rPr lang="ko-KR" altLang="en-US" smtClean="0"/>
-              <a:t>2025-11-06</a:t>
+              <a:t>2025-11-08</a:t>
             </a:fld>
             <a:endParaRPr lang="ko-KR" altLang="en-US"/>
           </a:p>
@@ -1874,7 +1874,7 @@
           <a:p>
             <a:fld id="{CBF1DC50-C5CA-44B4-A558-6C26647E5902}" type="datetimeFigureOut">
               <a:rPr lang="ko-KR" altLang="en-US" smtClean="0"/>
-              <a:t>2025-11-06</a:t>
+              <a:t>2025-11-08</a:t>
             </a:fld>
             <a:endParaRPr lang="ko-KR" altLang="en-US"/>
           </a:p>
@@ -1992,7 +1992,7 @@
           <a:p>
             <a:fld id="{CBF1DC50-C5CA-44B4-A558-6C26647E5902}" type="datetimeFigureOut">
               <a:rPr lang="ko-KR" altLang="en-US" smtClean="0"/>
-              <a:t>2025-11-06</a:t>
+              <a:t>2025-11-08</a:t>
             </a:fld>
             <a:endParaRPr lang="ko-KR" altLang="en-US"/>
           </a:p>
@@ -2087,7 +2087,7 @@
           <a:p>
             <a:fld id="{CBF1DC50-C5CA-44B4-A558-6C26647E5902}" type="datetimeFigureOut">
               <a:rPr lang="ko-KR" altLang="en-US" smtClean="0"/>
-              <a:t>2025-11-06</a:t>
+              <a:t>2025-11-08</a:t>
             </a:fld>
             <a:endParaRPr lang="ko-KR" altLang="en-US"/>
           </a:p>
@@ -2182,7 +2182,7 @@
           <a:p>
             <a:fld id="{CBF1DC50-C5CA-44B4-A558-6C26647E5902}" type="datetimeFigureOut">
               <a:rPr lang="ko-KR" altLang="en-US" smtClean="0"/>
-              <a:t>2025-11-06</a:t>
+              <a:t>2025-11-08</a:t>
             </a:fld>
             <a:endParaRPr lang="ko-KR" altLang="en-US"/>
           </a:p>
@@ -2489,7 +2489,7 @@
           <a:p>
             <a:fld id="{CBF1DC50-C5CA-44B4-A558-6C26647E5902}" type="datetimeFigureOut">
               <a:rPr lang="ko-KR" altLang="en-US" smtClean="0"/>
-              <a:t>2025-11-06</a:t>
+              <a:t>2025-11-08</a:t>
             </a:fld>
             <a:endParaRPr lang="ko-KR" altLang="en-US"/>
           </a:p>
@@ -2702,7 +2702,7 @@
           <a:p>
             <a:fld id="{CBF1DC50-C5CA-44B4-A558-6C26647E5902}" type="datetimeFigureOut">
               <a:rPr lang="ko-KR" altLang="en-US" smtClean="0"/>
-              <a:t>2025-11-06</a:t>
+              <a:t>2025-11-08</a:t>
             </a:fld>
             <a:endParaRPr lang="ko-KR" altLang="en-US"/>
           </a:p>
@@ -4423,6 +4423,36 @@
           </a:p>
         </p:txBody>
       </p:sp>
+      <p:pic>
+        <p:nvPicPr>
+          <p:cNvPr id="14" name="그림 13">
+            <a:extLst>
+              <a:ext uri="{FF2B5EF4-FFF2-40B4-BE49-F238E27FC236}">
+                <a16:creationId xmlns:a16="http://schemas.microsoft.com/office/drawing/2014/main" id="{86045430-5DED-A358-B1B6-22F85B6C1A95}"/>
+              </a:ext>
+            </a:extLst>
+          </p:cNvPr>
+          <p:cNvPicPr>
+            <a:picLocks noChangeAspect="1"/>
+          </p:cNvPicPr>
+          <p:nvPr/>
+        </p:nvPicPr>
+        <p:blipFill>
+          <a:blip r:embed="rId5"/>
+          <a:stretch>
+            <a:fillRect/>
+          </a:stretch>
+        </p:blipFill>
+        <p:spPr>
+          <a:xfrm>
+            <a:off x="10565163" y="28349969"/>
+            <a:ext cx="6569009" cy="6111770"/>
+          </a:xfrm>
+          <a:prstGeom prst="rect">
+            <a:avLst/>
+          </a:prstGeom>
+        </p:spPr>
+      </p:pic>
     </p:spTree>
     <p:extLst>
       <p:ext uri="{BB962C8B-B14F-4D97-AF65-F5344CB8AC3E}">

--- a/Document/2025경진대회 패널 배포-고등.pptx
+++ b/Document/2025경진대회 패널 배포-고등.pptx
@@ -3476,8 +3476,8 @@
         </p:nvSpPr>
         <p:spPr>
           <a:xfrm>
-            <a:off x="1327255" y="899030"/>
-            <a:ext cx="16814218" cy="3170099"/>
+            <a:off x="1327255" y="1291081"/>
+            <a:ext cx="16814218" cy="2785378"/>
           </a:xfrm>
           <a:prstGeom prst="rect">
             <a:avLst/>
@@ -3485,7 +3485,7 @@
           <a:noFill/>
         </p:spPr>
         <p:txBody>
-          <a:bodyPr wrap="none" rtlCol="0">
+          <a:bodyPr wrap="square" rtlCol="0">
             <a:spAutoFit/>
           </a:bodyPr>
           <a:lstStyle/>
@@ -3519,7 +3519,7 @@
             </a:endParaRPr>
           </a:p>
           <a:p>
-            <a:endParaRPr lang="en-US" altLang="ko-KR" sz="3500" dirty="0">
+            <a:endParaRPr lang="en-US" altLang="ko-KR" sz="1500" dirty="0">
               <a:solidFill>
                 <a:schemeClr val="bg1"/>
               </a:solidFill>
@@ -3534,36 +3534,56 @@
           </a:p>
           <a:p>
             <a:r>
-              <a:rPr lang="ko-KR" altLang="en-US" sz="4500" dirty="0">
+              <a:rPr lang="ko-KR" altLang="en-US" sz="4000" dirty="0">
                 <a:solidFill>
                   <a:schemeClr val="bg1"/>
                 </a:solidFill>
                 <a:latin typeface="SUITE Variable Light" pitchFamily="2" charset="-127"/>
                 <a:ea typeface="SUITE Variable Light" pitchFamily="2" charset="-127"/>
               </a:rPr>
-              <a:t>실시간 발전 데이터를 시각화해 에너지 이해와 활용을 돕는 교육</a:t>
-            </a:r>
-            <a:r>
-              <a:rPr lang="en-US" altLang="ko-KR" sz="4500" dirty="0">
+              <a:t>실시간 발전 데이터를 </a:t>
+            </a:r>
+            <a:r>
+              <a:rPr lang="ko-KR" altLang="en-US" sz="4000" dirty="0" err="1">
                 <a:solidFill>
                   <a:schemeClr val="bg1"/>
                 </a:solidFill>
                 <a:latin typeface="SUITE Variable Light" pitchFamily="2" charset="-127"/>
                 <a:ea typeface="SUITE Variable Light" pitchFamily="2" charset="-127"/>
               </a:rPr>
-              <a:t>·</a:t>
-            </a:r>
-            <a:r>
-              <a:rPr lang="ko-KR" altLang="en-US" sz="4500" dirty="0">
+              <a:t>시각화하여</a:t>
+            </a:r>
+            <a:r>
+              <a:rPr lang="ko-KR" altLang="en-US" sz="4000" dirty="0">
                 <a:solidFill>
                   <a:schemeClr val="bg1"/>
                 </a:solidFill>
                 <a:latin typeface="SUITE Variable Light" pitchFamily="2" charset="-127"/>
                 <a:ea typeface="SUITE Variable Light" pitchFamily="2" charset="-127"/>
               </a:rPr>
+              <a:t> 에너지 이해와 활용을 돕는 교육</a:t>
+            </a:r>
+            <a:r>
+              <a:rPr lang="en-US" altLang="ko-KR" sz="4000" dirty="0">
+                <a:solidFill>
+                  <a:schemeClr val="bg1"/>
+                </a:solidFill>
+                <a:latin typeface="SUITE Variable Light" pitchFamily="2" charset="-127"/>
+                <a:ea typeface="SUITE Variable Light" pitchFamily="2" charset="-127"/>
+              </a:rPr>
+              <a:t>·</a:t>
+            </a:r>
+            <a:r>
+              <a:rPr lang="ko-KR" altLang="en-US" sz="4000" dirty="0">
+                <a:solidFill>
+                  <a:schemeClr val="bg1"/>
+                </a:solidFill>
+                <a:latin typeface="SUITE Variable Light" pitchFamily="2" charset="-127"/>
+                <a:ea typeface="SUITE Variable Light" pitchFamily="2" charset="-127"/>
+              </a:rPr>
               <a:t>정보 플랫폼</a:t>
             </a:r>
-            <a:endParaRPr lang="ko-KR" altLang="en-US" sz="4500" dirty="0">
+            <a:endParaRPr lang="ko-KR" altLang="en-US" sz="4000" dirty="0">
               <a:solidFill>
                 <a:schemeClr val="bg1"/>
               </a:solidFill>
@@ -4165,7 +4185,7 @@
         <p:spPr>
           <a:xfrm>
             <a:off x="987631" y="11084576"/>
-            <a:ext cx="23081840" cy="3038204"/>
+            <a:ext cx="23081840" cy="2884316"/>
           </a:xfrm>
           <a:prstGeom prst="rect">
             <a:avLst/>
@@ -4192,34 +4212,34 @@
           </a:p>
           <a:p>
             <a:r>
-              <a:rPr lang="ko-KR" altLang="en-US" sz="6000" dirty="0">
+              <a:rPr lang="ko-KR" altLang="en-US" sz="5500" dirty="0">
                 <a:latin typeface="SUITE Variable Medium" pitchFamily="2" charset="-127"/>
                 <a:ea typeface="SUITE Variable Medium" pitchFamily="2" charset="-127"/>
               </a:rPr>
               <a:t>저희 웹사이트의 목적은 대한민국 국민이 우리나라의 전력생산 구조와 발전량 변동을 직관적으로 이해하도록 돕고</a:t>
             </a:r>
             <a:r>
-              <a:rPr lang="en-US" altLang="ko-KR" sz="6000" dirty="0">
+              <a:rPr lang="en-US" altLang="ko-KR" sz="5500" dirty="0">
                 <a:latin typeface="SUITE Variable Medium" pitchFamily="2" charset="-127"/>
                 <a:ea typeface="SUITE Variable Medium" pitchFamily="2" charset="-127"/>
               </a:rPr>
               <a:t>, </a:t>
             </a:r>
             <a:r>
-              <a:rPr lang="ko-KR" altLang="en-US" sz="6000" dirty="0">
+              <a:rPr lang="ko-KR" altLang="en-US" sz="5500" dirty="0">
                 <a:latin typeface="SUITE Variable Medium" pitchFamily="2" charset="-127"/>
                 <a:ea typeface="SUITE Variable Medium" pitchFamily="2" charset="-127"/>
               </a:rPr>
               <a:t>이를 다양한 분야로 확장시키는 것입니다</a:t>
             </a:r>
             <a:r>
-              <a:rPr lang="en-US" altLang="ko-KR" sz="6000" dirty="0">
+              <a:rPr lang="en-US" altLang="ko-KR" sz="5500" dirty="0">
                 <a:latin typeface="SUITE Variable Medium" pitchFamily="2" charset="-127"/>
                 <a:ea typeface="SUITE Variable Medium" pitchFamily="2" charset="-127"/>
               </a:rPr>
               <a:t>.</a:t>
             </a:r>
-            <a:endParaRPr lang="ko-KR" altLang="en-US" sz="6000" dirty="0">
+            <a:endParaRPr lang="ko-KR" altLang="en-US" sz="5500" dirty="0">
               <a:latin typeface="SUITE Variable Medium" pitchFamily="2" charset="-127"/>
               <a:ea typeface="SUITE Variable Medium" pitchFamily="2" charset="-127"/>
             </a:endParaRPr>
@@ -4241,7 +4261,7 @@
         <p:spPr>
           <a:xfrm>
             <a:off x="987630" y="14122780"/>
-            <a:ext cx="22885089" cy="3961534"/>
+            <a:ext cx="22885089" cy="3807645"/>
           </a:xfrm>
           <a:prstGeom prst="rect">
             <a:avLst/>
@@ -4268,49 +4288,49 @@
           </a:p>
           <a:p>
             <a:r>
-              <a:rPr lang="ko-KR" altLang="en-US" sz="6000" dirty="0">
+              <a:rPr lang="ko-KR" altLang="en-US" sz="5500" dirty="0">
                 <a:latin typeface="SUITE Variable Medium" pitchFamily="2" charset="-127"/>
                 <a:ea typeface="SUITE Variable Medium" pitchFamily="2" charset="-127"/>
               </a:rPr>
               <a:t>아이디어를 구상할 때</a:t>
             </a:r>
             <a:r>
-              <a:rPr lang="en-US" altLang="ko-KR" sz="6000" dirty="0">
+              <a:rPr lang="en-US" altLang="ko-KR" sz="5500" dirty="0">
                 <a:latin typeface="SUITE Variable Medium" pitchFamily="2" charset="-127"/>
                 <a:ea typeface="SUITE Variable Medium" pitchFamily="2" charset="-127"/>
               </a:rPr>
               <a:t>, </a:t>
             </a:r>
             <a:r>
-              <a:rPr lang="ko-KR" altLang="en-US" sz="6000" dirty="0">
+              <a:rPr lang="ko-KR" altLang="en-US" sz="5500" dirty="0">
                 <a:latin typeface="SUITE Variable Medium" pitchFamily="2" charset="-127"/>
                 <a:ea typeface="SUITE Variable Medium" pitchFamily="2" charset="-127"/>
               </a:rPr>
               <a:t>국민들이 실시간으로 발전량을 볼 수 있는 사이트가 없다는 것을 알게 되었습니다</a:t>
             </a:r>
             <a:r>
-              <a:rPr lang="en-US" altLang="ko-KR" sz="6000" dirty="0">
+              <a:rPr lang="en-US" altLang="ko-KR" sz="5500" dirty="0">
                 <a:latin typeface="SUITE Variable Medium" pitchFamily="2" charset="-127"/>
                 <a:ea typeface="SUITE Variable Medium" pitchFamily="2" charset="-127"/>
               </a:rPr>
               <a:t>. </a:t>
             </a:r>
             <a:r>
-              <a:rPr lang="ko-KR" altLang="en-US" sz="6000" dirty="0">
+              <a:rPr lang="ko-KR" altLang="en-US" sz="5500" dirty="0">
                 <a:latin typeface="SUITE Variable Medium" pitchFamily="2" charset="-127"/>
                 <a:ea typeface="SUITE Variable Medium" pitchFamily="2" charset="-127"/>
               </a:rPr>
               <a:t>사람들이 에너지 발전량의 흥미를 가지면 우리나라의 에너지 산업의 기대치를 올릴 수 있어</a:t>
             </a:r>
             <a:r>
-              <a:rPr lang="en-US" altLang="ko-KR" sz="6000" dirty="0">
+              <a:rPr lang="en-US" altLang="ko-KR" sz="5500" dirty="0">
                 <a:latin typeface="SUITE Variable Medium" pitchFamily="2" charset="-127"/>
                 <a:ea typeface="SUITE Variable Medium" pitchFamily="2" charset="-127"/>
               </a:rPr>
               <a:t>, </a:t>
             </a:r>
             <a:r>
-              <a:rPr lang="ko-KR" altLang="en-US" sz="6000" dirty="0">
+              <a:rPr lang="ko-KR" altLang="en-US" sz="5500" dirty="0">
                 <a:latin typeface="SUITE Variable Medium" pitchFamily="2" charset="-127"/>
                 <a:ea typeface="SUITE Variable Medium" pitchFamily="2" charset="-127"/>
               </a:rPr>
@@ -4359,13 +4379,13 @@
           <a:lstStyle/>
           <a:p>
             <a:r>
-              <a:rPr lang="ko-KR" altLang="en-US" sz="7100" dirty="0">
+              <a:rPr lang="ko-KR" altLang="en-US" sz="7000" dirty="0">
                 <a:latin typeface="SUITE Variable Heavy" pitchFamily="2" charset="-127"/>
                 <a:ea typeface="SUITE Variable Heavy" pitchFamily="2" charset="-127"/>
               </a:rPr>
               <a:t>기대효과</a:t>
             </a:r>
-            <a:endParaRPr lang="en-US" altLang="ko-KR" sz="7100" dirty="0">
+            <a:endParaRPr lang="en-US" altLang="ko-KR" sz="7000" dirty="0">
               <a:latin typeface="SUITE Variable Heavy" pitchFamily="2" charset="-127"/>
               <a:ea typeface="SUITE Variable Heavy" pitchFamily="2" charset="-127"/>
             </a:endParaRPr>
@@ -4425,10 +4445,10 @@
       </p:sp>
       <p:pic>
         <p:nvPicPr>
-          <p:cNvPr id="14" name="그림 13">
+          <p:cNvPr id="7" name="그림 6">
             <a:extLst>
               <a:ext uri="{FF2B5EF4-FFF2-40B4-BE49-F238E27FC236}">
-                <a16:creationId xmlns:a16="http://schemas.microsoft.com/office/drawing/2014/main" id="{86045430-5DED-A358-B1B6-22F85B6C1A95}"/>
+                <a16:creationId xmlns:a16="http://schemas.microsoft.com/office/drawing/2014/main" id="{8FB69A66-816F-C6C6-6C43-3FD951668F39}"/>
               </a:ext>
             </a:extLst>
           </p:cNvPr>
@@ -4445,14 +4465,551 @@
         </p:blipFill>
         <p:spPr>
           <a:xfrm>
-            <a:off x="10565163" y="28349969"/>
-            <a:ext cx="6569009" cy="6111770"/>
+            <a:off x="7614040" y="28732632"/>
+            <a:ext cx="8626588" cy="4854361"/>
           </a:xfrm>
           <a:prstGeom prst="rect">
             <a:avLst/>
           </a:prstGeom>
         </p:spPr>
       </p:pic>
+      <p:pic>
+        <p:nvPicPr>
+          <p:cNvPr id="18" name="그림 17">
+            <a:extLst>
+              <a:ext uri="{FF2B5EF4-FFF2-40B4-BE49-F238E27FC236}">
+                <a16:creationId xmlns:a16="http://schemas.microsoft.com/office/drawing/2014/main" id="{9E856F0C-1872-7271-CE4E-CA64B2D60860}"/>
+              </a:ext>
+            </a:extLst>
+          </p:cNvPr>
+          <p:cNvPicPr>
+            <a:picLocks noChangeAspect="1"/>
+          </p:cNvPicPr>
+          <p:nvPr/>
+        </p:nvPicPr>
+        <p:blipFill>
+          <a:blip r:embed="rId6"/>
+          <a:stretch>
+            <a:fillRect/>
+          </a:stretch>
+        </p:blipFill>
+        <p:spPr>
+          <a:xfrm>
+            <a:off x="1387648" y="28717391"/>
+            <a:ext cx="5273497" cy="4884843"/>
+          </a:xfrm>
+          <a:prstGeom prst="rect">
+            <a:avLst/>
+          </a:prstGeom>
+        </p:spPr>
+      </p:pic>
+      <p:pic>
+        <p:nvPicPr>
+          <p:cNvPr id="20" name="그림 19">
+            <a:extLst>
+              <a:ext uri="{FF2B5EF4-FFF2-40B4-BE49-F238E27FC236}">
+                <a16:creationId xmlns:a16="http://schemas.microsoft.com/office/drawing/2014/main" id="{21EF4D1C-31D4-7EFD-4A11-3F33EE877587}"/>
+              </a:ext>
+            </a:extLst>
+          </p:cNvPr>
+          <p:cNvPicPr>
+            <a:picLocks noChangeAspect="1"/>
+          </p:cNvPicPr>
+          <p:nvPr/>
+        </p:nvPicPr>
+        <p:blipFill>
+          <a:blip r:embed="rId7"/>
+          <a:stretch>
+            <a:fillRect/>
+          </a:stretch>
+        </p:blipFill>
+        <p:spPr>
+          <a:xfrm>
+            <a:off x="16885637" y="28770011"/>
+            <a:ext cx="6926690" cy="4779603"/>
+          </a:xfrm>
+          <a:prstGeom prst="rect">
+            <a:avLst/>
+          </a:prstGeom>
+        </p:spPr>
+      </p:pic>
+      <p:sp>
+        <p:nvSpPr>
+          <p:cNvPr id="21" name="TextBox 20">
+            <a:extLst>
+              <a:ext uri="{FF2B5EF4-FFF2-40B4-BE49-F238E27FC236}">
+                <a16:creationId xmlns:a16="http://schemas.microsoft.com/office/drawing/2014/main" id="{EC2D78CD-0BC2-C243-0A71-55C1D6D57D14}"/>
+              </a:ext>
+            </a:extLst>
+          </p:cNvPr>
+          <p:cNvSpPr txBox="1"/>
+          <p:nvPr/>
+        </p:nvSpPr>
+        <p:spPr>
+          <a:xfrm>
+            <a:off x="1206156" y="33982859"/>
+            <a:ext cx="5636479" cy="1169551"/>
+          </a:xfrm>
+          <a:prstGeom prst="rect">
+            <a:avLst/>
+          </a:prstGeom>
+          <a:noFill/>
+        </p:spPr>
+        <p:txBody>
+          <a:bodyPr wrap="none" rtlCol="0">
+            <a:spAutoFit/>
+          </a:bodyPr>
+          <a:lstStyle/>
+          <a:p>
+            <a:pPr algn="ctr"/>
+            <a:r>
+              <a:rPr lang="ko-KR" altLang="en-US" sz="3500" dirty="0">
+                <a:latin typeface="SUITE Variable Light" pitchFamily="2" charset="-127"/>
+                <a:ea typeface="SUITE Variable Light" pitchFamily="2" charset="-127"/>
+              </a:rPr>
+              <a:t>발전소 위치 표시 및 발전량 표시</a:t>
+            </a:r>
+            <a:endParaRPr lang="en-US" altLang="ko-KR" sz="3500" dirty="0">
+              <a:latin typeface="SUITE Variable Light" pitchFamily="2" charset="-127"/>
+              <a:ea typeface="SUITE Variable Light" pitchFamily="2" charset="-127"/>
+            </a:endParaRPr>
+          </a:p>
+          <a:p>
+            <a:pPr algn="ctr"/>
+            <a:r>
+              <a:rPr lang="en-US" altLang="ko-KR" sz="3500" dirty="0">
+                <a:latin typeface="SUITE Variable Light" pitchFamily="2" charset="-127"/>
+                <a:ea typeface="SUITE Variable Light" pitchFamily="2" charset="-127"/>
+              </a:rPr>
+              <a:t>(</a:t>
+            </a:r>
+            <a:r>
+              <a:rPr lang="ko-KR" altLang="en-US" sz="3500" dirty="0">
+                <a:latin typeface="SUITE Variable Light" pitchFamily="2" charset="-127"/>
+                <a:ea typeface="SUITE Variable Light" pitchFamily="2" charset="-127"/>
+              </a:rPr>
+              <a:t>그래프로 오늘 발전량 표시</a:t>
+            </a:r>
+            <a:r>
+              <a:rPr lang="en-US" altLang="ko-KR" sz="3500" dirty="0">
+                <a:latin typeface="SUITE Variable Light" pitchFamily="2" charset="-127"/>
+                <a:ea typeface="SUITE Variable Light" pitchFamily="2" charset="-127"/>
+              </a:rPr>
+              <a:t>)</a:t>
+            </a:r>
+            <a:endParaRPr lang="ko-KR" altLang="en-US" sz="3500" dirty="0">
+              <a:latin typeface="SUITE Variable Light" pitchFamily="2" charset="-127"/>
+              <a:ea typeface="SUITE Variable Light" pitchFamily="2" charset="-127"/>
+            </a:endParaRPr>
+          </a:p>
+        </p:txBody>
+      </p:sp>
+      <p:sp>
+        <p:nvSpPr>
+          <p:cNvPr id="24" name="TextBox 23">
+            <a:extLst>
+              <a:ext uri="{FF2B5EF4-FFF2-40B4-BE49-F238E27FC236}">
+                <a16:creationId xmlns:a16="http://schemas.microsoft.com/office/drawing/2014/main" id="{97CEC9C5-01EE-4608-F19A-5D05F5B020BE}"/>
+              </a:ext>
+            </a:extLst>
+          </p:cNvPr>
+          <p:cNvSpPr txBox="1"/>
+          <p:nvPr/>
+        </p:nvSpPr>
+        <p:spPr>
+          <a:xfrm>
+            <a:off x="10402717" y="34252163"/>
+            <a:ext cx="3049233" cy="630942"/>
+          </a:xfrm>
+          <a:prstGeom prst="rect">
+            <a:avLst/>
+          </a:prstGeom>
+          <a:noFill/>
+        </p:spPr>
+        <p:txBody>
+          <a:bodyPr wrap="none" rtlCol="0">
+            <a:spAutoFit/>
+          </a:bodyPr>
+          <a:lstStyle/>
+          <a:p>
+            <a:r>
+              <a:rPr lang="ko-KR" altLang="en-US" sz="3500" dirty="0">
+                <a:latin typeface="SUITE Variable Light" pitchFamily="2" charset="-127"/>
+                <a:ea typeface="SUITE Variable Light" pitchFamily="2" charset="-127"/>
+              </a:rPr>
+              <a:t>발전량 예측</a:t>
+            </a:r>
+            <a:r>
+              <a:rPr lang="en-US" altLang="ko-KR" sz="3500" dirty="0">
+                <a:latin typeface="SUITE Variable Light" pitchFamily="2" charset="-127"/>
+                <a:ea typeface="SUITE Variable Light" pitchFamily="2" charset="-127"/>
+              </a:rPr>
+              <a:t> </a:t>
+            </a:r>
+            <a:r>
+              <a:rPr lang="ko-KR" altLang="en-US" sz="3500" dirty="0">
+                <a:latin typeface="SUITE Variable Light" pitchFamily="2" charset="-127"/>
+                <a:ea typeface="SUITE Variable Light" pitchFamily="2" charset="-127"/>
+              </a:rPr>
+              <a:t>게임</a:t>
+            </a:r>
+          </a:p>
+        </p:txBody>
+      </p:sp>
+      <p:sp>
+        <p:nvSpPr>
+          <p:cNvPr id="25" name="TextBox 24">
+            <a:extLst>
+              <a:ext uri="{FF2B5EF4-FFF2-40B4-BE49-F238E27FC236}">
+                <a16:creationId xmlns:a16="http://schemas.microsoft.com/office/drawing/2014/main" id="{49C0F630-D564-24F7-5D0B-62EEF1ACED82}"/>
+              </a:ext>
+            </a:extLst>
+          </p:cNvPr>
+          <p:cNvSpPr txBox="1"/>
+          <p:nvPr/>
+        </p:nvSpPr>
+        <p:spPr>
+          <a:xfrm>
+            <a:off x="16870064" y="33982859"/>
+            <a:ext cx="7199407" cy="1169551"/>
+          </a:xfrm>
+          <a:prstGeom prst="rect">
+            <a:avLst/>
+          </a:prstGeom>
+          <a:noFill/>
+        </p:spPr>
+        <p:txBody>
+          <a:bodyPr wrap="none" rtlCol="0">
+            <a:spAutoFit/>
+          </a:bodyPr>
+          <a:lstStyle/>
+          <a:p>
+            <a:pPr algn="ctr"/>
+            <a:r>
+              <a:rPr lang="ko-KR" altLang="en-US" sz="3500" dirty="0">
+                <a:latin typeface="SUITE Variable Light" pitchFamily="2" charset="-127"/>
+                <a:ea typeface="SUITE Variable Light" pitchFamily="2" charset="-127"/>
+              </a:rPr>
+              <a:t>전기 발전의 대한 더 다양한 콘텐츠 제공</a:t>
+            </a:r>
+            <a:br>
+              <a:rPr lang="en-US" altLang="ko-KR" sz="3500" dirty="0">
+                <a:latin typeface="SUITE Variable Light" pitchFamily="2" charset="-127"/>
+                <a:ea typeface="SUITE Variable Light" pitchFamily="2" charset="-127"/>
+              </a:rPr>
+            </a:br>
+            <a:r>
+              <a:rPr lang="en-US" altLang="ko-KR" sz="3500" dirty="0">
+                <a:latin typeface="SUITE Variable Light" pitchFamily="2" charset="-127"/>
+                <a:ea typeface="SUITE Variable Light" pitchFamily="2" charset="-127"/>
+              </a:rPr>
+              <a:t>(</a:t>
+            </a:r>
+            <a:r>
+              <a:rPr lang="ko-KR" altLang="en-US" sz="3500" dirty="0">
+                <a:latin typeface="SUITE Variable Light" pitchFamily="2" charset="-127"/>
+                <a:ea typeface="SUITE Variable Light" pitchFamily="2" charset="-127"/>
+              </a:rPr>
+              <a:t>태그 기능을 통해 사용자 맞춤 검색 가능</a:t>
+            </a:r>
+            <a:r>
+              <a:rPr lang="en-US" altLang="ko-KR" sz="3500" dirty="0">
+                <a:latin typeface="SUITE Variable Light" pitchFamily="2" charset="-127"/>
+                <a:ea typeface="SUITE Variable Light" pitchFamily="2" charset="-127"/>
+              </a:rPr>
+              <a:t>)</a:t>
+            </a:r>
+            <a:endParaRPr lang="ko-KR" altLang="en-US" sz="3500" dirty="0">
+              <a:latin typeface="SUITE Variable Light" pitchFamily="2" charset="-127"/>
+              <a:ea typeface="SUITE Variable Light" pitchFamily="2" charset="-127"/>
+            </a:endParaRPr>
+          </a:p>
+        </p:txBody>
+      </p:sp>
+      <p:sp>
+        <p:nvSpPr>
+          <p:cNvPr id="26" name="TextBox 25">
+            <a:extLst>
+              <a:ext uri="{FF2B5EF4-FFF2-40B4-BE49-F238E27FC236}">
+                <a16:creationId xmlns:a16="http://schemas.microsoft.com/office/drawing/2014/main" id="{3C6AB279-559B-B12A-EAC2-865D216A0989}"/>
+              </a:ext>
+            </a:extLst>
+          </p:cNvPr>
+          <p:cNvSpPr txBox="1"/>
+          <p:nvPr/>
+        </p:nvSpPr>
+        <p:spPr>
+          <a:xfrm rot="984251">
+            <a:off x="8564190" y="25348998"/>
+            <a:ext cx="1337320" cy="477054"/>
+          </a:xfrm>
+          <a:prstGeom prst="rect">
+            <a:avLst/>
+          </a:prstGeom>
+          <a:noFill/>
+        </p:spPr>
+        <p:txBody>
+          <a:bodyPr wrap="square" rtlCol="0">
+            <a:spAutoFit/>
+          </a:bodyPr>
+          <a:lstStyle/>
+          <a:p>
+            <a:r>
+              <a:rPr lang="en-US" altLang="ko-KR" sz="2500" dirty="0">
+                <a:latin typeface="SUITE Variable Light" pitchFamily="2" charset="-127"/>
+                <a:ea typeface="SUITE Variable Light" pitchFamily="2" charset="-127"/>
+              </a:rPr>
+              <a:t>API </a:t>
+            </a:r>
+            <a:r>
+              <a:rPr lang="ko-KR" altLang="en-US" sz="2500" dirty="0">
+                <a:latin typeface="SUITE Variable Light" pitchFamily="2" charset="-127"/>
+                <a:ea typeface="SUITE Variable Light" pitchFamily="2" charset="-127"/>
+              </a:rPr>
+              <a:t>호출</a:t>
+            </a:r>
+          </a:p>
+        </p:txBody>
+      </p:sp>
+      <p:sp>
+        <p:nvSpPr>
+          <p:cNvPr id="27" name="TextBox 26">
+            <a:extLst>
+              <a:ext uri="{FF2B5EF4-FFF2-40B4-BE49-F238E27FC236}">
+                <a16:creationId xmlns:a16="http://schemas.microsoft.com/office/drawing/2014/main" id="{BE1525E0-6F2A-C88D-7E7F-29378A988045}"/>
+              </a:ext>
+            </a:extLst>
+          </p:cNvPr>
+          <p:cNvSpPr txBox="1"/>
+          <p:nvPr/>
+        </p:nvSpPr>
+        <p:spPr>
+          <a:xfrm rot="20278901">
+            <a:off x="13940691" y="25167021"/>
+            <a:ext cx="1337320" cy="477054"/>
+          </a:xfrm>
+          <a:prstGeom prst="rect">
+            <a:avLst/>
+          </a:prstGeom>
+          <a:noFill/>
+        </p:spPr>
+        <p:txBody>
+          <a:bodyPr wrap="square" rtlCol="0">
+            <a:spAutoFit/>
+          </a:bodyPr>
+          <a:lstStyle/>
+          <a:p>
+            <a:r>
+              <a:rPr lang="en-US" altLang="ko-KR" sz="2500" dirty="0">
+                <a:latin typeface="SUITE Variable Light" pitchFamily="2" charset="-127"/>
+                <a:ea typeface="SUITE Variable Light" pitchFamily="2" charset="-127"/>
+              </a:rPr>
+              <a:t>API </a:t>
+            </a:r>
+            <a:r>
+              <a:rPr lang="ko-KR" altLang="en-US" sz="2500" dirty="0">
+                <a:latin typeface="SUITE Variable Light" pitchFamily="2" charset="-127"/>
+                <a:ea typeface="SUITE Variable Light" pitchFamily="2" charset="-127"/>
+              </a:rPr>
+              <a:t>호출</a:t>
+            </a:r>
+          </a:p>
+        </p:txBody>
+      </p:sp>
+      <p:sp>
+        <p:nvSpPr>
+          <p:cNvPr id="28" name="TextBox 27">
+            <a:extLst>
+              <a:ext uri="{FF2B5EF4-FFF2-40B4-BE49-F238E27FC236}">
+                <a16:creationId xmlns:a16="http://schemas.microsoft.com/office/drawing/2014/main" id="{ED8E7A7F-CDCC-0704-CABC-A40CAE6A423B}"/>
+              </a:ext>
+            </a:extLst>
+          </p:cNvPr>
+          <p:cNvSpPr txBox="1"/>
+          <p:nvPr/>
+        </p:nvSpPr>
+        <p:spPr>
+          <a:xfrm rot="984251">
+            <a:off x="5882355" y="23971528"/>
+            <a:ext cx="3031918" cy="477054"/>
+          </a:xfrm>
+          <a:prstGeom prst="rect">
+            <a:avLst/>
+          </a:prstGeom>
+          <a:noFill/>
+        </p:spPr>
+        <p:txBody>
+          <a:bodyPr wrap="square" rtlCol="0">
+            <a:spAutoFit/>
+          </a:bodyPr>
+          <a:lstStyle/>
+          <a:p>
+            <a:r>
+              <a:rPr lang="ko-KR" altLang="en-US" sz="2500" dirty="0">
+                <a:latin typeface="SUITE Variable Light" pitchFamily="2" charset="-127"/>
+                <a:ea typeface="SUITE Variable Light" pitchFamily="2" charset="-127"/>
+              </a:rPr>
+              <a:t>실시간 발전량 제공</a:t>
+            </a:r>
+          </a:p>
+        </p:txBody>
+      </p:sp>
+      <p:sp>
+        <p:nvSpPr>
+          <p:cNvPr id="29" name="TextBox 28">
+            <a:extLst>
+              <a:ext uri="{FF2B5EF4-FFF2-40B4-BE49-F238E27FC236}">
+                <a16:creationId xmlns:a16="http://schemas.microsoft.com/office/drawing/2014/main" id="{8D861B0F-786C-28A5-2960-CC6C6CF1D0D7}"/>
+              </a:ext>
+            </a:extLst>
+          </p:cNvPr>
+          <p:cNvSpPr txBox="1"/>
+          <p:nvPr/>
+        </p:nvSpPr>
+        <p:spPr>
+          <a:xfrm rot="984251">
+            <a:off x="14950156" y="21092586"/>
+            <a:ext cx="3031918" cy="477054"/>
+          </a:xfrm>
+          <a:prstGeom prst="rect">
+            <a:avLst/>
+          </a:prstGeom>
+          <a:noFill/>
+        </p:spPr>
+        <p:txBody>
+          <a:bodyPr wrap="square" rtlCol="0">
+            <a:spAutoFit/>
+          </a:bodyPr>
+          <a:lstStyle/>
+          <a:p>
+            <a:r>
+              <a:rPr lang="ko-KR" altLang="en-US" sz="2500" dirty="0">
+                <a:latin typeface="SUITE Variable Light" pitchFamily="2" charset="-127"/>
+                <a:ea typeface="SUITE Variable Light" pitchFamily="2" charset="-127"/>
+              </a:rPr>
+              <a:t>발전량 정보 업데이트</a:t>
+            </a:r>
+          </a:p>
+        </p:txBody>
+      </p:sp>
+      <p:sp>
+        <p:nvSpPr>
+          <p:cNvPr id="30" name="TextBox 29">
+            <a:extLst>
+              <a:ext uri="{FF2B5EF4-FFF2-40B4-BE49-F238E27FC236}">
+                <a16:creationId xmlns:a16="http://schemas.microsoft.com/office/drawing/2014/main" id="{A0A3C1D0-2D2E-465E-03CA-3FE05D230622}"/>
+              </a:ext>
+            </a:extLst>
+          </p:cNvPr>
+          <p:cNvSpPr txBox="1"/>
+          <p:nvPr/>
+        </p:nvSpPr>
+        <p:spPr>
+          <a:xfrm rot="20278901">
+            <a:off x="5578616" y="22579012"/>
+            <a:ext cx="1337320" cy="477054"/>
+          </a:xfrm>
+          <a:prstGeom prst="rect">
+            <a:avLst/>
+          </a:prstGeom>
+          <a:noFill/>
+        </p:spPr>
+        <p:txBody>
+          <a:bodyPr wrap="square" rtlCol="0">
+            <a:spAutoFit/>
+          </a:bodyPr>
+          <a:lstStyle/>
+          <a:p>
+            <a:r>
+              <a:rPr lang="ko-KR" altLang="en-US" sz="2500" dirty="0">
+                <a:latin typeface="SUITE Variable Light" pitchFamily="2" charset="-127"/>
+                <a:ea typeface="SUITE Variable Light" pitchFamily="2" charset="-127"/>
+              </a:rPr>
+              <a:t>정보 제공</a:t>
+            </a:r>
+          </a:p>
+        </p:txBody>
+      </p:sp>
+      <p:sp>
+        <p:nvSpPr>
+          <p:cNvPr id="31" name="TextBox 30">
+            <a:extLst>
+              <a:ext uri="{FF2B5EF4-FFF2-40B4-BE49-F238E27FC236}">
+                <a16:creationId xmlns:a16="http://schemas.microsoft.com/office/drawing/2014/main" id="{489ADA00-189E-ADE6-DA62-7EF0D5FE2B3C}"/>
+              </a:ext>
+            </a:extLst>
+          </p:cNvPr>
+          <p:cNvSpPr txBox="1"/>
+          <p:nvPr/>
+        </p:nvSpPr>
+        <p:spPr>
+          <a:xfrm rot="20278901">
+            <a:off x="7785194" y="20533965"/>
+            <a:ext cx="1674400" cy="477054"/>
+          </a:xfrm>
+          <a:prstGeom prst="rect">
+            <a:avLst/>
+          </a:prstGeom>
+          <a:noFill/>
+        </p:spPr>
+        <p:txBody>
+          <a:bodyPr wrap="square" rtlCol="0">
+            <a:spAutoFit/>
+          </a:bodyPr>
+          <a:lstStyle/>
+          <a:p>
+            <a:r>
+              <a:rPr lang="ko-KR" altLang="en-US" sz="2500">
+                <a:latin typeface="SUITE Variable Light" pitchFamily="2" charset="-127"/>
+                <a:ea typeface="SUITE Variable Light" pitchFamily="2" charset="-127"/>
+              </a:rPr>
+              <a:t>사용자 요청</a:t>
+            </a:r>
+            <a:endParaRPr lang="ko-KR" altLang="en-US" sz="2500" dirty="0">
+              <a:latin typeface="SUITE Variable Light" pitchFamily="2" charset="-127"/>
+              <a:ea typeface="SUITE Variable Light" pitchFamily="2" charset="-127"/>
+            </a:endParaRPr>
+          </a:p>
+        </p:txBody>
+      </p:sp>
+      <p:sp>
+        <p:nvSpPr>
+          <p:cNvPr id="32" name="TextBox 31">
+            <a:extLst>
+              <a:ext uri="{FF2B5EF4-FFF2-40B4-BE49-F238E27FC236}">
+                <a16:creationId xmlns:a16="http://schemas.microsoft.com/office/drawing/2014/main" id="{1E4BA56F-10A3-4CC7-97CE-D059140711DA}"/>
+              </a:ext>
+            </a:extLst>
+          </p:cNvPr>
+          <p:cNvSpPr txBox="1"/>
+          <p:nvPr/>
+        </p:nvSpPr>
+        <p:spPr>
+          <a:xfrm rot="20278901">
+            <a:off x="14305302" y="23550370"/>
+            <a:ext cx="3622110" cy="477054"/>
+          </a:xfrm>
+          <a:prstGeom prst="rect">
+            <a:avLst/>
+          </a:prstGeom>
+          <a:noFill/>
+        </p:spPr>
+        <p:txBody>
+          <a:bodyPr wrap="square" rtlCol="0">
+            <a:spAutoFit/>
+          </a:bodyPr>
+          <a:lstStyle/>
+          <a:p>
+            <a:r>
+              <a:rPr lang="ko-KR" altLang="en-US" sz="2500" dirty="0">
+                <a:latin typeface="SUITE Variable Light" pitchFamily="2" charset="-127"/>
+                <a:ea typeface="SUITE Variable Light" pitchFamily="2" charset="-127"/>
+              </a:rPr>
+              <a:t>발전소당 기간별 발전량 정보</a:t>
+            </a:r>
+          </a:p>
+        </p:txBody>
+      </p:sp>
     </p:spTree>
     <p:extLst>
       <p:ext uri="{BB962C8B-B14F-4D97-AF65-F5344CB8AC3E}">

--- a/Document/2025경진대회 패널 배포-고등.pptx
+++ b/Document/2025경진대회 패널 배포-고등.pptx
@@ -254,7 +254,7 @@
           <a:p>
             <a:fld id="{CBF1DC50-C5CA-44B4-A558-6C26647E5902}" type="datetimeFigureOut">
               <a:rPr lang="ko-KR" altLang="en-US" smtClean="0"/>
-              <a:t>2025-11-08</a:t>
+              <a:t>2025-11-10</a:t>
             </a:fld>
             <a:endParaRPr lang="ko-KR" altLang="en-US"/>
           </a:p>
@@ -511,7 +511,7 @@
           <a:p>
             <a:fld id="{CBF1DC50-C5CA-44B4-A558-6C26647E5902}" type="datetimeFigureOut">
               <a:rPr lang="ko-KR" altLang="en-US" smtClean="0"/>
-              <a:t>2025-11-08</a:t>
+              <a:t>2025-11-10</a:t>
             </a:fld>
             <a:endParaRPr lang="ko-KR" altLang="en-US"/>
           </a:p>
@@ -681,7 +681,7 @@
           <a:p>
             <a:fld id="{CBF1DC50-C5CA-44B4-A558-6C26647E5902}" type="datetimeFigureOut">
               <a:rPr lang="ko-KR" altLang="en-US" smtClean="0"/>
-              <a:t>2025-11-08</a:t>
+              <a:t>2025-11-10</a:t>
             </a:fld>
             <a:endParaRPr lang="ko-KR" altLang="en-US"/>
           </a:p>
@@ -861,7 +861,7 @@
           <a:p>
             <a:fld id="{CBF1DC50-C5CA-44B4-A558-6C26647E5902}" type="datetimeFigureOut">
               <a:rPr lang="ko-KR" altLang="en-US" smtClean="0"/>
-              <a:t>2025-11-08</a:t>
+              <a:t>2025-11-10</a:t>
             </a:fld>
             <a:endParaRPr lang="ko-KR" altLang="en-US"/>
           </a:p>
@@ -1031,7 +1031,7 @@
           <a:p>
             <a:fld id="{CBF1DC50-C5CA-44B4-A558-6C26647E5902}" type="datetimeFigureOut">
               <a:rPr lang="ko-KR" altLang="en-US" smtClean="0"/>
-              <a:t>2025-11-08</a:t>
+              <a:t>2025-11-10</a:t>
             </a:fld>
             <a:endParaRPr lang="ko-KR" altLang="en-US"/>
           </a:p>
@@ -1275,7 +1275,7 @@
           <a:p>
             <a:fld id="{CBF1DC50-C5CA-44B4-A558-6C26647E5902}" type="datetimeFigureOut">
               <a:rPr lang="ko-KR" altLang="en-US" smtClean="0"/>
-              <a:t>2025-11-08</a:t>
+              <a:t>2025-11-10</a:t>
             </a:fld>
             <a:endParaRPr lang="ko-KR" altLang="en-US"/>
           </a:p>
@@ -1507,7 +1507,7 @@
           <a:p>
             <a:fld id="{CBF1DC50-C5CA-44B4-A558-6C26647E5902}" type="datetimeFigureOut">
               <a:rPr lang="ko-KR" altLang="en-US" smtClean="0"/>
-              <a:t>2025-11-08</a:t>
+              <a:t>2025-11-10</a:t>
             </a:fld>
             <a:endParaRPr lang="ko-KR" altLang="en-US"/>
           </a:p>
@@ -1874,7 +1874,7 @@
           <a:p>
             <a:fld id="{CBF1DC50-C5CA-44B4-A558-6C26647E5902}" type="datetimeFigureOut">
               <a:rPr lang="ko-KR" altLang="en-US" smtClean="0"/>
-              <a:t>2025-11-08</a:t>
+              <a:t>2025-11-10</a:t>
             </a:fld>
             <a:endParaRPr lang="ko-KR" altLang="en-US"/>
           </a:p>
@@ -1992,7 +1992,7 @@
           <a:p>
             <a:fld id="{CBF1DC50-C5CA-44B4-A558-6C26647E5902}" type="datetimeFigureOut">
               <a:rPr lang="ko-KR" altLang="en-US" smtClean="0"/>
-              <a:t>2025-11-08</a:t>
+              <a:t>2025-11-10</a:t>
             </a:fld>
             <a:endParaRPr lang="ko-KR" altLang="en-US"/>
           </a:p>
@@ -2087,7 +2087,7 @@
           <a:p>
             <a:fld id="{CBF1DC50-C5CA-44B4-A558-6C26647E5902}" type="datetimeFigureOut">
               <a:rPr lang="ko-KR" altLang="en-US" smtClean="0"/>
-              <a:t>2025-11-08</a:t>
+              <a:t>2025-11-10</a:t>
             </a:fld>
             <a:endParaRPr lang="ko-KR" altLang="en-US"/>
           </a:p>
@@ -2182,7 +2182,7 @@
           <a:p>
             <a:fld id="{CBF1DC50-C5CA-44B4-A558-6C26647E5902}" type="datetimeFigureOut">
               <a:rPr lang="ko-KR" altLang="en-US" smtClean="0"/>
-              <a:t>2025-11-08</a:t>
+              <a:t>2025-11-10</a:t>
             </a:fld>
             <a:endParaRPr lang="ko-KR" altLang="en-US"/>
           </a:p>
@@ -2489,7 +2489,7 @@
           <a:p>
             <a:fld id="{CBF1DC50-C5CA-44B4-A558-6C26647E5902}" type="datetimeFigureOut">
               <a:rPr lang="ko-KR" altLang="en-US" smtClean="0"/>
-              <a:t>2025-11-08</a:t>
+              <a:t>2025-11-10</a:t>
             </a:fld>
             <a:endParaRPr lang="ko-KR" altLang="en-US"/>
           </a:p>
@@ -2702,7 +2702,7 @@
           <a:p>
             <a:fld id="{CBF1DC50-C5CA-44B4-A558-6C26647E5902}" type="datetimeFigureOut">
               <a:rPr lang="ko-KR" altLang="en-US" smtClean="0"/>
-              <a:t>2025-11-08</a:t>
+              <a:t>2025-11-10</a:t>
             </a:fld>
             <a:endParaRPr lang="ko-KR" altLang="en-US"/>
           </a:p>
@@ -4365,7 +4365,7 @@
         <p:spPr>
           <a:xfrm>
             <a:off x="1015623" y="36992170"/>
-            <a:ext cx="21538268" cy="4555093"/>
+            <a:ext cx="10124888" cy="6247864"/>
           </a:xfrm>
           <a:prstGeom prst="rect">
             <a:avLst/>
@@ -4392,48 +4392,99 @@
           </a:p>
           <a:p>
             <a:r>
-              <a:rPr lang="ko-KR" altLang="en-US" sz="5500" dirty="0"/>
-              <a:t>이 프로젝트는 실시간 발전 데이터를 시각적으로 보여줌으로써 </a:t>
-            </a:r>
-            <a:endParaRPr lang="en-US" altLang="ko-KR" sz="5500" dirty="0"/>
-          </a:p>
-          <a:p>
-            <a:r>
-              <a:rPr lang="ko-KR" altLang="en-US" sz="5500" dirty="0"/>
-              <a:t>학생들의 체험형 에너지 학습 기회를 제공하고</a:t>
-            </a:r>
-            <a:r>
-              <a:rPr lang="en-US" altLang="ko-KR" sz="5500" dirty="0"/>
+              <a:rPr lang="ko-KR" altLang="en-US" sz="5500" dirty="0">
+                <a:latin typeface="SUITE Variable Light" pitchFamily="2" charset="-127"/>
+                <a:ea typeface="SUITE Variable Light" pitchFamily="2" charset="-127"/>
+              </a:rPr>
+              <a:t>이 프로젝트는 실시간 발전 데이터를 </a:t>
+            </a:r>
+            <a:endParaRPr lang="en-US" altLang="ko-KR" sz="5500" dirty="0">
+              <a:latin typeface="SUITE Variable Light" pitchFamily="2" charset="-127"/>
+              <a:ea typeface="SUITE Variable Light" pitchFamily="2" charset="-127"/>
+            </a:endParaRPr>
+          </a:p>
+          <a:p>
+            <a:r>
+              <a:rPr lang="ko-KR" altLang="en-US" sz="5500" dirty="0">
+                <a:latin typeface="SUITE Variable Light" pitchFamily="2" charset="-127"/>
+                <a:ea typeface="SUITE Variable Light" pitchFamily="2" charset="-127"/>
+              </a:rPr>
+              <a:t>시각적으로 보여줌으로써 학생들의 </a:t>
+            </a:r>
+            <a:endParaRPr lang="en-US" altLang="ko-KR" sz="5500" dirty="0">
+              <a:latin typeface="SUITE Variable Light" pitchFamily="2" charset="-127"/>
+              <a:ea typeface="SUITE Variable Light" pitchFamily="2" charset="-127"/>
+            </a:endParaRPr>
+          </a:p>
+          <a:p>
+            <a:r>
+              <a:rPr lang="ko-KR" altLang="en-US" sz="5500" dirty="0">
+                <a:latin typeface="SUITE Variable Light" pitchFamily="2" charset="-127"/>
+                <a:ea typeface="SUITE Variable Light" pitchFamily="2" charset="-127"/>
+              </a:rPr>
+              <a:t>체험형 에너지 학습 기회를 제공하고</a:t>
+            </a:r>
+            <a:r>
+              <a:rPr lang="en-US" altLang="ko-KR" sz="5500" dirty="0">
+                <a:latin typeface="SUITE Variable Light" pitchFamily="2" charset="-127"/>
+                <a:ea typeface="SUITE Variable Light" pitchFamily="2" charset="-127"/>
+              </a:rPr>
               <a:t>,</a:t>
             </a:r>
             <a:r>
-              <a:rPr lang="ko-KR" altLang="en-US" sz="5500" dirty="0"/>
-              <a:t> 시민들의 환경 의식을 </a:t>
-            </a:r>
-            <a:endParaRPr lang="en-US" altLang="ko-KR" sz="5500" dirty="0"/>
-          </a:p>
-          <a:p>
-            <a:r>
-              <a:rPr lang="ko-KR" altLang="en-US" sz="5500" dirty="0"/>
-              <a:t>높입니다</a:t>
-            </a:r>
-            <a:r>
-              <a:rPr lang="en-US" altLang="ko-KR" sz="5500" dirty="0"/>
+              <a:rPr lang="ko-KR" altLang="en-US" sz="5500" dirty="0">
+                <a:latin typeface="SUITE Variable Light" pitchFamily="2" charset="-127"/>
+                <a:ea typeface="SUITE Variable Light" pitchFamily="2" charset="-127"/>
+              </a:rPr>
+              <a:t> </a:t>
+            </a:r>
+            <a:endParaRPr lang="en-US" altLang="ko-KR" sz="5500" dirty="0">
+              <a:latin typeface="SUITE Variable Light" pitchFamily="2" charset="-127"/>
+              <a:ea typeface="SUITE Variable Light" pitchFamily="2" charset="-127"/>
+            </a:endParaRPr>
+          </a:p>
+          <a:p>
+            <a:r>
+              <a:rPr lang="ko-KR" altLang="en-US" sz="5500" dirty="0">
+                <a:latin typeface="SUITE Variable Light" pitchFamily="2" charset="-127"/>
+                <a:ea typeface="SUITE Variable Light" pitchFamily="2" charset="-127"/>
+              </a:rPr>
+              <a:t>시민들의 환경 의식을 높입니다</a:t>
+            </a:r>
+            <a:r>
+              <a:rPr lang="en-US" altLang="ko-KR" sz="5500" dirty="0">
+                <a:latin typeface="SUITE Variable Light" pitchFamily="2" charset="-127"/>
+                <a:ea typeface="SUITE Variable Light" pitchFamily="2" charset="-127"/>
+              </a:rPr>
               <a:t>. </a:t>
             </a:r>
-            <a:r>
-              <a:rPr lang="ko-KR" altLang="en-US" sz="5500" dirty="0"/>
-              <a:t>또한 데이터를 활용해 에너지 산업의 효율적 의사결정을 </a:t>
-            </a:r>
-            <a:endParaRPr lang="en-US" altLang="ko-KR" sz="5500" dirty="0"/>
-          </a:p>
-          <a:p>
-            <a:r>
-              <a:rPr lang="ko-KR" altLang="en-US" sz="5500" dirty="0"/>
-              <a:t>지원합니다</a:t>
-            </a:r>
-            <a:r>
-              <a:rPr lang="en-US" altLang="ko-KR" sz="5500" dirty="0"/>
+          </a:p>
+          <a:p>
+            <a:r>
+              <a:rPr lang="ko-KR" altLang="en-US" sz="5500" dirty="0">
+                <a:latin typeface="SUITE Variable Light" pitchFamily="2" charset="-127"/>
+                <a:ea typeface="SUITE Variable Light" pitchFamily="2" charset="-127"/>
+              </a:rPr>
+              <a:t>또한 데이터를 활용해 에너지 산업의 </a:t>
+            </a:r>
+            <a:endParaRPr lang="en-US" altLang="ko-KR" sz="5500" dirty="0">
+              <a:latin typeface="SUITE Variable Light" pitchFamily="2" charset="-127"/>
+              <a:ea typeface="SUITE Variable Light" pitchFamily="2" charset="-127"/>
+            </a:endParaRPr>
+          </a:p>
+          <a:p>
+            <a:r>
+              <a:rPr lang="ko-KR" altLang="en-US" sz="5500" dirty="0">
+                <a:latin typeface="SUITE Variable Light" pitchFamily="2" charset="-127"/>
+                <a:ea typeface="SUITE Variable Light" pitchFamily="2" charset="-127"/>
+              </a:rPr>
+              <a:t>효율적인 의사결정을 지원합니다</a:t>
+            </a:r>
+            <a:r>
+              <a:rPr lang="en-US" altLang="ko-KR" sz="5500" dirty="0">
+                <a:latin typeface="SUITE Variable Light" pitchFamily="2" charset="-127"/>
+                <a:ea typeface="SUITE Variable Light" pitchFamily="2" charset="-127"/>
+              </a:rPr>
               <a:t>.</a:t>
             </a:r>
             <a:endParaRPr lang="ko-KR" altLang="en-US" sz="5500" dirty="0">
@@ -5006,6 +5057,115 @@
                 <a:ea typeface="SUITE Variable Light" pitchFamily="2" charset="-127"/>
               </a:rPr>
               <a:t>발전소당 기간별 발전량 정보</a:t>
+            </a:r>
+          </a:p>
+        </p:txBody>
+      </p:sp>
+      <p:sp>
+        <p:nvSpPr>
+          <p:cNvPr id="4" name="TextBox 3">
+            <a:extLst>
+              <a:ext uri="{FF2B5EF4-FFF2-40B4-BE49-F238E27FC236}">
+                <a16:creationId xmlns:a16="http://schemas.microsoft.com/office/drawing/2014/main" id="{9D6B1D7A-E36A-6786-3E6B-7ECEBA191A16}"/>
+              </a:ext>
+            </a:extLst>
+          </p:cNvPr>
+          <p:cNvSpPr txBox="1"/>
+          <p:nvPr/>
+        </p:nvSpPr>
+        <p:spPr>
+          <a:xfrm>
+            <a:off x="12430174" y="36992170"/>
+            <a:ext cx="4259499" cy="4555093"/>
+          </a:xfrm>
+          <a:prstGeom prst="rect">
+            <a:avLst/>
+          </a:prstGeom>
+          <a:noFill/>
+        </p:spPr>
+        <p:txBody>
+          <a:bodyPr wrap="none" rtlCol="0">
+            <a:spAutoFit/>
+          </a:bodyPr>
+          <a:lstStyle/>
+          <a:p>
+            <a:r>
+              <a:rPr lang="ko-KR" altLang="en-US" sz="7000" dirty="0">
+                <a:latin typeface="SUITE Variable Heavy" pitchFamily="2" charset="-127"/>
+                <a:ea typeface="SUITE Variable Heavy" pitchFamily="2" charset="-127"/>
+              </a:rPr>
+              <a:t>메뉴 창</a:t>
+            </a:r>
+            <a:r>
+              <a:rPr lang="en-US" altLang="ko-KR" sz="7000" dirty="0">
+                <a:latin typeface="SUITE Variable Heavy" pitchFamily="2" charset="-127"/>
+                <a:ea typeface="SUITE Variable Heavy" pitchFamily="2" charset="-127"/>
+              </a:rPr>
+              <a:t> </a:t>
+            </a:r>
+          </a:p>
+          <a:p>
+            <a:r>
+              <a:rPr lang="ko-KR" altLang="en-US" sz="5500" dirty="0">
+                <a:latin typeface="SUITE Variable Light" pitchFamily="2" charset="-127"/>
+                <a:ea typeface="SUITE Variable Light" pitchFamily="2" charset="-127"/>
+              </a:rPr>
+              <a:t>●</a:t>
+            </a:r>
+            <a:r>
+              <a:rPr lang="en-US" altLang="ko-KR" sz="5500" dirty="0">
+                <a:latin typeface="SUITE Variable Light" pitchFamily="2" charset="-127"/>
+                <a:ea typeface="SUITE Variable Light" pitchFamily="2" charset="-127"/>
+              </a:rPr>
+              <a:t> Map</a:t>
+            </a:r>
+          </a:p>
+          <a:p>
+            <a:r>
+              <a:rPr lang="ko-KR" altLang="en-US" sz="5500" dirty="0">
+                <a:latin typeface="SUITE Variable Light" pitchFamily="2" charset="-127"/>
+                <a:ea typeface="SUITE Variable Light" pitchFamily="2" charset="-127"/>
+              </a:rPr>
+              <a:t>● </a:t>
+            </a:r>
+            <a:r>
+              <a:rPr lang="en-US" altLang="ko-KR" sz="5500" dirty="0">
+                <a:latin typeface="SUITE Variable Light" pitchFamily="2" charset="-127"/>
+                <a:ea typeface="SUITE Variable Light" pitchFamily="2" charset="-127"/>
+              </a:rPr>
+              <a:t>Slide</a:t>
+            </a:r>
+          </a:p>
+          <a:p>
+            <a:r>
+              <a:rPr lang="ko-KR" altLang="en-US" sz="5500" dirty="0">
+                <a:latin typeface="SUITE Variable Light" pitchFamily="2" charset="-127"/>
+                <a:ea typeface="SUITE Variable Light" pitchFamily="2" charset="-127"/>
+              </a:rPr>
+              <a:t>●</a:t>
+            </a:r>
+            <a:r>
+              <a:rPr lang="en-US" altLang="ko-KR" sz="5500" dirty="0">
+                <a:latin typeface="SUITE Variable Light" pitchFamily="2" charset="-127"/>
+                <a:ea typeface="SUITE Variable Light" pitchFamily="2" charset="-127"/>
+              </a:rPr>
+              <a:t> Game</a:t>
+            </a:r>
+          </a:p>
+          <a:p>
+            <a:r>
+              <a:rPr lang="ko-KR" altLang="en-US" sz="5500" dirty="0">
+                <a:latin typeface="SUITE Variable Light" pitchFamily="2" charset="-127"/>
+                <a:ea typeface="SUITE Variable Light" pitchFamily="2" charset="-127"/>
+              </a:rPr>
+              <a:t>●</a:t>
+            </a:r>
+            <a:r>
+              <a:rPr lang="en-US" altLang="ko-KR" sz="5500" dirty="0">
+                <a:latin typeface="SUITE Variable Light" pitchFamily="2" charset="-127"/>
+                <a:ea typeface="SUITE Variable Light" pitchFamily="2" charset="-127"/>
+              </a:rPr>
+              <a:t> Education</a:t>
             </a:r>
           </a:p>
         </p:txBody>

--- a/Document/2025경진대회 패널 배포-고등.pptx
+++ b/Document/2025경진대회 패널 배포-고등.pptx
@@ -4364,8 +4364,8 @@
         </p:nvSpPr>
         <p:spPr>
           <a:xfrm>
-            <a:off x="1015623" y="36992170"/>
-            <a:ext cx="10124888" cy="6247864"/>
+            <a:off x="1327255" y="36992170"/>
+            <a:ext cx="11374498" cy="6247864"/>
           </a:xfrm>
           <a:prstGeom prst="rect">
             <a:avLst/>
@@ -4373,7 +4373,7 @@
           <a:noFill/>
         </p:spPr>
         <p:txBody>
-          <a:bodyPr wrap="none" rtlCol="0">
+          <a:bodyPr wrap="square" rtlCol="0">
             <a:spAutoFit/>
           </a:bodyPr>
           <a:lstStyle/>
@@ -4398,87 +4398,72 @@
               </a:rPr>
               <a:t>이 프로젝트는 실시간 발전 데이터를 </a:t>
             </a:r>
-            <a:endParaRPr lang="en-US" altLang="ko-KR" sz="5500" dirty="0">
-              <a:latin typeface="SUITE Variable Light" pitchFamily="2" charset="-127"/>
-              <a:ea typeface="SUITE Variable Light" pitchFamily="2" charset="-127"/>
-            </a:endParaRPr>
-          </a:p>
-          <a:p>
+            <a:br>
+              <a:rPr lang="en-US" altLang="ko-KR" sz="5500" dirty="0">
+                <a:latin typeface="SUITE Variable Light" pitchFamily="2" charset="-127"/>
+                <a:ea typeface="SUITE Variable Light" pitchFamily="2" charset="-127"/>
+              </a:rPr>
+            </a:br>
             <a:r>
               <a:rPr lang="ko-KR" altLang="en-US" sz="5500" dirty="0">
                 <a:latin typeface="SUITE Variable Light" pitchFamily="2" charset="-127"/>
                 <a:ea typeface="SUITE Variable Light" pitchFamily="2" charset="-127"/>
               </a:rPr>
-              <a:t>시각적으로 보여줌으로써 학생들의 </a:t>
-            </a:r>
-            <a:endParaRPr lang="en-US" altLang="ko-KR" sz="5500" dirty="0">
-              <a:latin typeface="SUITE Variable Light" pitchFamily="2" charset="-127"/>
-              <a:ea typeface="SUITE Variable Light" pitchFamily="2" charset="-127"/>
-            </a:endParaRPr>
-          </a:p>
-          <a:p>
+              <a:t>시각적으로 보여줌으로써 학생들의 체험형 에너지 학습 기회를 제공하고</a:t>
+            </a:r>
+            <a:r>
+              <a:rPr lang="en-US" altLang="ko-KR" sz="5500" dirty="0">
+                <a:latin typeface="SUITE Variable Light" pitchFamily="2" charset="-127"/>
+                <a:ea typeface="SUITE Variable Light" pitchFamily="2" charset="-127"/>
+              </a:rPr>
+              <a:t>,</a:t>
+            </a:r>
             <a:r>
               <a:rPr lang="ko-KR" altLang="en-US" sz="5500" dirty="0">
                 <a:latin typeface="SUITE Variable Light" pitchFamily="2" charset="-127"/>
                 <a:ea typeface="SUITE Variable Light" pitchFamily="2" charset="-127"/>
               </a:rPr>
-              <a:t>체험형 에너지 학습 기회를 제공하고</a:t>
-            </a:r>
-            <a:r>
+              <a:t> 시민들의 </a:t>
+            </a:r>
+            <a:br>
               <a:rPr lang="en-US" altLang="ko-KR" sz="5500" dirty="0">
                 <a:latin typeface="SUITE Variable Light" pitchFamily="2" charset="-127"/>
                 <a:ea typeface="SUITE Variable Light" pitchFamily="2" charset="-127"/>
               </a:rPr>
-              <a:t>,</a:t>
-            </a:r>
+            </a:br>
             <a:r>
               <a:rPr lang="ko-KR" altLang="en-US" sz="5500" dirty="0">
                 <a:latin typeface="SUITE Variable Light" pitchFamily="2" charset="-127"/>
                 <a:ea typeface="SUITE Variable Light" pitchFamily="2" charset="-127"/>
               </a:rPr>
-              <a:t> </a:t>
-            </a:r>
-            <a:endParaRPr lang="en-US" altLang="ko-KR" sz="5500" dirty="0">
-              <a:latin typeface="SUITE Variable Light" pitchFamily="2" charset="-127"/>
-              <a:ea typeface="SUITE Variable Light" pitchFamily="2" charset="-127"/>
-            </a:endParaRPr>
-          </a:p>
-          <a:p>
+              <a:t>환경 의식을 높입니다</a:t>
+            </a:r>
+            <a:r>
+              <a:rPr lang="en-US" altLang="ko-KR" sz="5500" dirty="0">
+                <a:latin typeface="SUITE Variable Light" pitchFamily="2" charset="-127"/>
+                <a:ea typeface="SUITE Variable Light" pitchFamily="2" charset="-127"/>
+              </a:rPr>
+              <a:t>. </a:t>
+            </a:r>
             <a:r>
               <a:rPr lang="ko-KR" altLang="en-US" sz="5500" dirty="0">
                 <a:latin typeface="SUITE Variable Light" pitchFamily="2" charset="-127"/>
                 <a:ea typeface="SUITE Variable Light" pitchFamily="2" charset="-127"/>
               </a:rPr>
-              <a:t>시민들의 환경 의식을 높입니다</a:t>
-            </a:r>
-            <a:r>
+              <a:t>또한 데이터를 활용해 에너지 산업의 효율적인 의사결정을 </a:t>
+            </a:r>
+            <a:br>
               <a:rPr lang="en-US" altLang="ko-KR" sz="5500" dirty="0">
                 <a:latin typeface="SUITE Variable Light" pitchFamily="2" charset="-127"/>
                 <a:ea typeface="SUITE Variable Light" pitchFamily="2" charset="-127"/>
               </a:rPr>
-              <a:t>. </a:t>
-            </a:r>
-          </a:p>
-          <a:p>
+            </a:br>
             <a:r>
               <a:rPr lang="ko-KR" altLang="en-US" sz="5500" dirty="0">
                 <a:latin typeface="SUITE Variable Light" pitchFamily="2" charset="-127"/>
                 <a:ea typeface="SUITE Variable Light" pitchFamily="2" charset="-127"/>
               </a:rPr>
-              <a:t>또한 데이터를 활용해 에너지 산업의 </a:t>
-            </a:r>
-            <a:endParaRPr lang="en-US" altLang="ko-KR" sz="5500" dirty="0">
-              <a:latin typeface="SUITE Variable Light" pitchFamily="2" charset="-127"/>
-              <a:ea typeface="SUITE Variable Light" pitchFamily="2" charset="-127"/>
-            </a:endParaRPr>
-          </a:p>
-          <a:p>
-            <a:r>
-              <a:rPr lang="ko-KR" altLang="en-US" sz="5500" dirty="0">
-                <a:latin typeface="SUITE Variable Light" pitchFamily="2" charset="-127"/>
-                <a:ea typeface="SUITE Variable Light" pitchFamily="2" charset="-127"/>
-              </a:rPr>
-              <a:t>효율적인 의사결정을 지원합니다</a:t>
+              <a:t>지원합니다</a:t>
             </a:r>
             <a:r>
               <a:rPr lang="en-US" altLang="ko-KR" sz="5500" dirty="0">
@@ -5075,8 +5060,8 @@
         </p:nvSpPr>
         <p:spPr>
           <a:xfrm>
-            <a:off x="12430174" y="36992170"/>
-            <a:ext cx="4259499" cy="4555093"/>
+            <a:off x="13439638" y="36992170"/>
+            <a:ext cx="10629833" cy="4555093"/>
           </a:xfrm>
           <a:prstGeom prst="rect">
             <a:avLst/>
@@ -5117,15 +5102,26 @@
                 <a:latin typeface="SUITE Variable Light" pitchFamily="2" charset="-127"/>
                 <a:ea typeface="SUITE Variable Light" pitchFamily="2" charset="-127"/>
               </a:rPr>
-              <a:t> Map</a:t>
-            </a:r>
-          </a:p>
-          <a:p>
+              <a:t> Map: </a:t>
+            </a:r>
             <a:r>
               <a:rPr lang="ko-KR" altLang="en-US" sz="5500" dirty="0">
                 <a:latin typeface="SUITE Variable Light" pitchFamily="2" charset="-127"/>
                 <a:ea typeface="SUITE Variable Light" pitchFamily="2" charset="-127"/>
               </a:rPr>
+              <a:t>지도로 발전소 위치 확인</a:t>
+            </a:r>
+            <a:endParaRPr lang="en-US" altLang="ko-KR" sz="5500" dirty="0">
+              <a:latin typeface="SUITE Variable Light" pitchFamily="2" charset="-127"/>
+              <a:ea typeface="SUITE Variable Light" pitchFamily="2" charset="-127"/>
+            </a:endParaRPr>
+          </a:p>
+          <a:p>
+            <a:r>
+              <a:rPr lang="ko-KR" altLang="en-US" sz="5500" dirty="0">
+                <a:latin typeface="SUITE Variable Light" pitchFamily="2" charset="-127"/>
+                <a:ea typeface="SUITE Variable Light" pitchFamily="2" charset="-127"/>
+              </a:rPr>
               <a:t>● </a:t>
             </a:r>
             <a:r>
@@ -5133,15 +5129,26 @@
                 <a:latin typeface="SUITE Variable Light" pitchFamily="2" charset="-127"/>
                 <a:ea typeface="SUITE Variable Light" pitchFamily="2" charset="-127"/>
               </a:rPr>
-              <a:t>Slide</a:t>
-            </a:r>
-          </a:p>
-          <a:p>
+              <a:t>Slide: </a:t>
+            </a:r>
             <a:r>
               <a:rPr lang="ko-KR" altLang="en-US" sz="5500" dirty="0">
                 <a:latin typeface="SUITE Variable Light" pitchFamily="2" charset="-127"/>
                 <a:ea typeface="SUITE Variable Light" pitchFamily="2" charset="-127"/>
               </a:rPr>
+              <a:t>시간 슬라이더로 발전량 확인</a:t>
+            </a:r>
+            <a:endParaRPr lang="en-US" altLang="ko-KR" sz="5500" dirty="0">
+              <a:latin typeface="SUITE Variable Light" pitchFamily="2" charset="-127"/>
+              <a:ea typeface="SUITE Variable Light" pitchFamily="2" charset="-127"/>
+            </a:endParaRPr>
+          </a:p>
+          <a:p>
+            <a:r>
+              <a:rPr lang="ko-KR" altLang="en-US" sz="5500" dirty="0">
+                <a:latin typeface="SUITE Variable Light" pitchFamily="2" charset="-127"/>
+                <a:ea typeface="SUITE Variable Light" pitchFamily="2" charset="-127"/>
+              </a:rPr>
               <a:t>●</a:t>
             </a:r>
             <a:r>
@@ -5149,15 +5156,26 @@
                 <a:latin typeface="SUITE Variable Light" pitchFamily="2" charset="-127"/>
                 <a:ea typeface="SUITE Variable Light" pitchFamily="2" charset="-127"/>
               </a:rPr>
-              <a:t> Game</a:t>
-            </a:r>
-          </a:p>
-          <a:p>
+              <a:t> Game: </a:t>
+            </a:r>
             <a:r>
               <a:rPr lang="ko-KR" altLang="en-US" sz="5500" dirty="0">
                 <a:latin typeface="SUITE Variable Light" pitchFamily="2" charset="-127"/>
                 <a:ea typeface="SUITE Variable Light" pitchFamily="2" charset="-127"/>
               </a:rPr>
+              <a:t>발전량 예측 게임</a:t>
+            </a:r>
+            <a:endParaRPr lang="en-US" altLang="ko-KR" sz="5500" dirty="0">
+              <a:latin typeface="SUITE Variable Light" pitchFamily="2" charset="-127"/>
+              <a:ea typeface="SUITE Variable Light" pitchFamily="2" charset="-127"/>
+            </a:endParaRPr>
+          </a:p>
+          <a:p>
+            <a:r>
+              <a:rPr lang="ko-KR" altLang="en-US" sz="5500" dirty="0">
+                <a:latin typeface="SUITE Variable Light" pitchFamily="2" charset="-127"/>
+                <a:ea typeface="SUITE Variable Light" pitchFamily="2" charset="-127"/>
+              </a:rPr>
               <a:t>●</a:t>
             </a:r>
             <a:r>
@@ -5165,8 +5183,19 @@
                 <a:latin typeface="SUITE Variable Light" pitchFamily="2" charset="-127"/>
                 <a:ea typeface="SUITE Variable Light" pitchFamily="2" charset="-127"/>
               </a:rPr>
-              <a:t> Education</a:t>
-            </a:r>
+              <a:t> Education: </a:t>
+            </a:r>
+            <a:r>
+              <a:rPr lang="ko-KR" altLang="en-US" sz="5500" dirty="0">
+                <a:latin typeface="SUITE Variable Light" pitchFamily="2" charset="-127"/>
+                <a:ea typeface="SUITE Variable Light" pitchFamily="2" charset="-127"/>
+              </a:rPr>
+              <a:t>태그 기반 콘텐츠 매칭</a:t>
+            </a:r>
+            <a:endParaRPr lang="en-US" altLang="ko-KR" sz="5500" dirty="0">
+              <a:latin typeface="SUITE Variable Light" pitchFamily="2" charset="-127"/>
+              <a:ea typeface="SUITE Variable Light" pitchFamily="2" charset="-127"/>
+            </a:endParaRPr>
           </a:p>
         </p:txBody>
       </p:sp>
